--- a/projects/spanisch/kl07/sequenz-02-familia/02c-possessiv/PPT-02c.pptx
+++ b/projects/spanisch/kl07/sequenz-02-familia/02c-possessiv/PPT-02c.pptx
@@ -10,6 +10,14 @@
     <p:sldId id="258" r:id="rId9"/>
     <p:sldId id="259" r:id="rId10"/>
     <p:sldId id="260" r:id="rId11"/>
+    <p:sldId id="261" r:id="rId12"/>
+    <p:sldId id="262" r:id="rId13"/>
+    <p:sldId id="263" r:id="rId14"/>
+    <p:sldId id="264" r:id="rId15"/>
+    <p:sldId id="265" r:id="rId16"/>
+    <p:sldId id="266" r:id="rId17"/>
+    <p:sldId id="267" r:id="rId18"/>
+    <p:sldId id="268" r:id="rId19"/>
   </p:sldIdLst>
   <p:sldSz cx="12191695" cy="6858000" type="screen4x3"/>
   <p:notesSz cx="6858000" cy="9144000"/>
@@ -3323,6 +3331,2180 @@
 </p:sld>
 </file>
 
+<file path=ppt/slides/slide10.xml><?xml version="1.0" encoding="utf-8"?>
+<p:sld xmlns:a="http://schemas.openxmlformats.org/drawingml/2006/main" xmlns:p="http://schemas.openxmlformats.org/presentationml/2006/main" xmlns:r="http://schemas.openxmlformats.org/officeDocument/2006/relationships">
+  <p:cSld>
+    <p:spTree>
+      <p:nvGrpSpPr>
+        <p:cNvPr id="1" name=""/>
+        <p:cNvGrpSpPr/>
+        <p:nvPr/>
+      </p:nvGrpSpPr>
+      <p:grpSpPr/>
+      <p:sp>
+        <p:nvSpPr>
+          <p:cNvPr id="2" name="Rectangle 1"/>
+          <p:cNvSpPr/>
+          <p:nvPr/>
+        </p:nvSpPr>
+        <p:spPr>
+          <a:xfrm>
+            <a:off x="0" y="0"/>
+            <a:ext cx="12191695" cy="457200"/>
+          </a:xfrm>
+          <a:prstGeom prst="rect">
+            <a:avLst/>
+          </a:prstGeom>
+          <a:solidFill>
+            <a:srgbClr val="C41E3A"/>
+          </a:solidFill>
+          <a:ln>
+            <a:noFill/>
+          </a:ln>
+        </p:spPr>
+        <p:style>
+          <a:lnRef idx="1">
+            <a:schemeClr val="accent1"/>
+          </a:lnRef>
+          <a:fillRef idx="3">
+            <a:schemeClr val="accent1"/>
+          </a:fillRef>
+          <a:effectRef idx="2">
+            <a:schemeClr val="accent1"/>
+          </a:effectRef>
+          <a:fontRef idx="minor">
+            <a:schemeClr val="lt1"/>
+          </a:fontRef>
+        </p:style>
+        <p:txBody>
+          <a:bodyPr rtlCol="0" anchor="ctr"/>
+          <a:lstStyle/>
+          <a:p>
+            <a:pPr algn="ctr"/>
+          </a:p>
+        </p:txBody>
+      </p:sp>
+      <p:sp>
+        <p:nvSpPr>
+          <p:cNvPr id="3" name="TextBox 2"/>
+          <p:cNvSpPr txBox="1"/>
+          <p:nvPr/>
+        </p:nvSpPr>
+        <p:spPr>
+          <a:xfrm>
+            <a:off x="274320" y="91440"/>
+            <a:ext cx="3657600" cy="274320"/>
+          </a:xfrm>
+          <a:prstGeom prst="rect">
+            <a:avLst/>
+          </a:prstGeom>
+          <a:noFill/>
+        </p:spPr>
+        <p:txBody>
+          <a:bodyPr wrap="none">
+            <a:spAutoFit/>
+          </a:bodyPr>
+          <a:lstStyle/>
+          <a:p>
+            <a:pPr algn="l">
+              <a:defRPr sz="1400" b="1">
+                <a:solidFill>
+                  <a:srgbClr val="FFFFFF"/>
+                </a:solidFill>
+                <a:latin typeface="Arial"/>
+              </a:defRPr>
+            </a:pPr>
+            <a:r>
+              <a:t>Spanisch Klasse 7 · LP-02c</a:t>
+            </a:r>
+          </a:p>
+        </p:txBody>
+      </p:sp>
+      <p:sp>
+        <p:nvSpPr>
+          <p:cNvPr id="4" name="Rectangle 3"/>
+          <p:cNvSpPr/>
+          <p:nvPr/>
+        </p:nvSpPr>
+        <p:spPr>
+          <a:xfrm>
+            <a:off x="0" y="6583680"/>
+            <a:ext cx="12191695" cy="274320"/>
+          </a:xfrm>
+          <a:prstGeom prst="rect">
+            <a:avLst/>
+          </a:prstGeom>
+          <a:solidFill>
+            <a:srgbClr val="F5F5F5"/>
+          </a:solidFill>
+          <a:ln>
+            <a:noFill/>
+          </a:ln>
+        </p:spPr>
+        <p:style>
+          <a:lnRef idx="1">
+            <a:schemeClr val="accent1"/>
+          </a:lnRef>
+          <a:fillRef idx="3">
+            <a:schemeClr val="accent1"/>
+          </a:fillRef>
+          <a:effectRef idx="2">
+            <a:schemeClr val="accent1"/>
+          </a:effectRef>
+          <a:fontRef idx="minor">
+            <a:schemeClr val="lt1"/>
+          </a:fontRef>
+        </p:style>
+        <p:txBody>
+          <a:bodyPr rtlCol="0" anchor="ctr"/>
+          <a:lstStyle/>
+          <a:p>
+            <a:pPr algn="ctr"/>
+          </a:p>
+        </p:txBody>
+      </p:sp>
+      <p:sp>
+        <p:nvSpPr>
+          <p:cNvPr id="5" name="TextBox 4"/>
+          <p:cNvSpPr txBox="1"/>
+          <p:nvPr/>
+        </p:nvSpPr>
+        <p:spPr>
+          <a:xfrm>
+            <a:off x="274320" y="6601968"/>
+            <a:ext cx="4572000" cy="228600"/>
+          </a:xfrm>
+          <a:prstGeom prst="rect">
+            <a:avLst/>
+          </a:prstGeom>
+          <a:noFill/>
+        </p:spPr>
+        <p:txBody>
+          <a:bodyPr wrap="none">
+            <a:spAutoFit/>
+          </a:bodyPr>
+          <a:lstStyle/>
+          <a:p>
+            <a:pPr algn="l">
+              <a:defRPr sz="1000" b="0">
+                <a:solidFill>
+                  <a:srgbClr val="555555"/>
+                </a:solidFill>
+                <a:latin typeface="Arial"/>
+              </a:defRPr>
+            </a:pPr>
+            <a:r>
+              <a:t>Mi familia</a:t>
+            </a:r>
+          </a:p>
+        </p:txBody>
+      </p:sp>
+      <p:sp>
+        <p:nvSpPr>
+          <p:cNvPr id="6" name="TextBox 5"/>
+          <p:cNvSpPr txBox="1"/>
+          <p:nvPr/>
+        </p:nvSpPr>
+        <p:spPr>
+          <a:xfrm>
+            <a:off x="9144000" y="6601968"/>
+            <a:ext cx="2743200" cy="228600"/>
+          </a:xfrm>
+          <a:prstGeom prst="rect">
+            <a:avLst/>
+          </a:prstGeom>
+          <a:noFill/>
+        </p:spPr>
+        <p:txBody>
+          <a:bodyPr wrap="none">
+            <a:spAutoFit/>
+          </a:bodyPr>
+          <a:lstStyle/>
+          <a:p>
+            <a:pPr algn="r">
+              <a:defRPr sz="1000" b="0">
+                <a:solidFill>
+                  <a:srgbClr val="555555"/>
+                </a:solidFill>
+                <a:latin typeface="Arial"/>
+              </a:defRPr>
+            </a:pPr>
+            <a:r>
+              <a:t>Sequenz 2</a:t>
+            </a:r>
+          </a:p>
+        </p:txBody>
+      </p:sp>
+      <p:sp>
+        <p:nvSpPr>
+          <p:cNvPr id="7" name="Rectangle 6"/>
+          <p:cNvSpPr/>
+          <p:nvPr/>
+        </p:nvSpPr>
+        <p:spPr>
+          <a:xfrm>
+            <a:off x="457200" y="640080"/>
+            <a:ext cx="1828800" cy="457200"/>
+          </a:xfrm>
+          <a:prstGeom prst="rect">
+            <a:avLst/>
+          </a:prstGeom>
+          <a:solidFill>
+            <a:srgbClr val="2A7A4B"/>
+          </a:solidFill>
+          <a:ln>
+            <a:noFill/>
+          </a:ln>
+        </p:spPr>
+        <p:style>
+          <a:lnRef idx="1">
+            <a:schemeClr val="accent1"/>
+          </a:lnRef>
+          <a:fillRef idx="3">
+            <a:schemeClr val="accent1"/>
+          </a:fillRef>
+          <a:effectRef idx="2">
+            <a:schemeClr val="accent1"/>
+          </a:effectRef>
+          <a:fontRef idx="minor">
+            <a:schemeClr val="lt1"/>
+          </a:fontRef>
+        </p:style>
+        <p:txBody>
+          <a:bodyPr rtlCol="0" anchor="ctr"/>
+          <a:lstStyle/>
+          <a:p>
+            <a:pPr algn="ctr"/>
+          </a:p>
+        </p:txBody>
+      </p:sp>
+      <p:sp>
+        <p:nvSpPr>
+          <p:cNvPr id="8" name="TextBox 7"/>
+          <p:cNvSpPr txBox="1"/>
+          <p:nvPr/>
+        </p:nvSpPr>
+        <p:spPr>
+          <a:xfrm>
+            <a:off x="548640" y="713231"/>
+            <a:ext cx="1645920" cy="320040"/>
+          </a:xfrm>
+          <a:prstGeom prst="rect">
+            <a:avLst/>
+          </a:prstGeom>
+          <a:noFill/>
+        </p:spPr>
+        <p:txBody>
+          <a:bodyPr wrap="none">
+            <a:spAutoFit/>
+          </a:bodyPr>
+          <a:lstStyle/>
+          <a:p>
+            <a:pPr algn="ctr">
+              <a:defRPr sz="1400" b="1">
+                <a:solidFill>
+                  <a:srgbClr val="FFFFFF"/>
+                </a:solidFill>
+                <a:latin typeface="Arial"/>
+              </a:defRPr>
+            </a:pPr>
+            <a:r>
+              <a:t>LÖSUNG</a:t>
+            </a:r>
+          </a:p>
+        </p:txBody>
+      </p:sp>
+      <p:sp>
+        <p:nvSpPr>
+          <p:cNvPr id="9" name="TextBox 8"/>
+          <p:cNvSpPr txBox="1"/>
+          <p:nvPr/>
+        </p:nvSpPr>
+        <p:spPr>
+          <a:xfrm>
+            <a:off x="457200" y="1280160"/>
+            <a:ext cx="11274552" cy="731520"/>
+          </a:xfrm>
+          <a:prstGeom prst="rect">
+            <a:avLst/>
+          </a:prstGeom>
+          <a:noFill/>
+        </p:spPr>
+        <p:txBody>
+          <a:bodyPr wrap="none">
+            <a:spAutoFit/>
+          </a:bodyPr>
+          <a:lstStyle/>
+          <a:p>
+            <a:pPr algn="l">
+              <a:defRPr sz="3200" b="1">
+                <a:solidFill>
+                  <a:srgbClr val="C41E3A"/>
+                </a:solidFill>
+                <a:latin typeface="Arial"/>
+              </a:defRPr>
+            </a:pPr>
+            <a:r>
+              <a:t>✅ Lösung</a:t>
+            </a:r>
+          </a:p>
+        </p:txBody>
+      </p:sp>
+      <p:sp>
+        <p:nvSpPr>
+          <p:cNvPr id="10" name="TextBox 9"/>
+          <p:cNvSpPr txBox="1"/>
+          <p:nvPr/>
+        </p:nvSpPr>
+        <p:spPr>
+          <a:xfrm>
+            <a:off x="640080" y="2011680"/>
+            <a:ext cx="5029200" cy="548640"/>
+          </a:xfrm>
+          <a:prstGeom prst="rect">
+            <a:avLst/>
+          </a:prstGeom>
+          <a:noFill/>
+        </p:spPr>
+        <p:txBody>
+          <a:bodyPr wrap="none">
+            <a:spAutoFit/>
+          </a:bodyPr>
+          <a:lstStyle/>
+          <a:p>
+            <a:pPr algn="l">
+              <a:defRPr sz="2400" b="1">
+                <a:solidFill>
+                  <a:srgbClr val="C41E3A"/>
+                </a:solidFill>
+                <a:latin typeface="Arial"/>
+              </a:defRPr>
+            </a:pPr>
+            <a:r>
+              <a:t>meine Schwester</a:t>
+            </a:r>
+          </a:p>
+        </p:txBody>
+      </p:sp>
+      <p:sp>
+        <p:nvSpPr>
+          <p:cNvPr id="11" name="TextBox 10"/>
+          <p:cNvSpPr txBox="1"/>
+          <p:nvPr/>
+        </p:nvSpPr>
+        <p:spPr>
+          <a:xfrm>
+            <a:off x="5943600" y="2011680"/>
+            <a:ext cx="5029200" cy="548640"/>
+          </a:xfrm>
+          <a:prstGeom prst="rect">
+            <a:avLst/>
+          </a:prstGeom>
+          <a:noFill/>
+        </p:spPr>
+        <p:txBody>
+          <a:bodyPr wrap="none">
+            <a:spAutoFit/>
+          </a:bodyPr>
+          <a:lstStyle/>
+          <a:p>
+            <a:pPr algn="l">
+              <a:defRPr sz="2400" b="1">
+                <a:solidFill>
+                  <a:srgbClr val="2A7A4B"/>
+                </a:solidFill>
+                <a:latin typeface="Arial"/>
+              </a:defRPr>
+            </a:pPr>
+            <a:r>
+              <a:t>mi hermana</a:t>
+            </a:r>
+          </a:p>
+        </p:txBody>
+      </p:sp>
+      <p:sp>
+        <p:nvSpPr>
+          <p:cNvPr id="12" name="TextBox 11"/>
+          <p:cNvSpPr txBox="1"/>
+          <p:nvPr/>
+        </p:nvSpPr>
+        <p:spPr>
+          <a:xfrm>
+            <a:off x="640080" y="3108960"/>
+            <a:ext cx="5029200" cy="548640"/>
+          </a:xfrm>
+          <a:prstGeom prst="rect">
+            <a:avLst/>
+          </a:prstGeom>
+          <a:noFill/>
+        </p:spPr>
+        <p:txBody>
+          <a:bodyPr wrap="none">
+            <a:spAutoFit/>
+          </a:bodyPr>
+          <a:lstStyle/>
+          <a:p>
+            <a:pPr algn="l">
+              <a:defRPr sz="2400" b="1">
+                <a:solidFill>
+                  <a:srgbClr val="C41E3A"/>
+                </a:solidFill>
+                <a:latin typeface="Arial"/>
+              </a:defRPr>
+            </a:pPr>
+            <a:r>
+              <a:t>deine Eltern</a:t>
+            </a:r>
+          </a:p>
+        </p:txBody>
+      </p:sp>
+      <p:sp>
+        <p:nvSpPr>
+          <p:cNvPr id="13" name="TextBox 12"/>
+          <p:cNvSpPr txBox="1"/>
+          <p:nvPr/>
+        </p:nvSpPr>
+        <p:spPr>
+          <a:xfrm>
+            <a:off x="5943600" y="3108960"/>
+            <a:ext cx="5029200" cy="548640"/>
+          </a:xfrm>
+          <a:prstGeom prst="rect">
+            <a:avLst/>
+          </a:prstGeom>
+          <a:noFill/>
+        </p:spPr>
+        <p:txBody>
+          <a:bodyPr wrap="none">
+            <a:spAutoFit/>
+          </a:bodyPr>
+          <a:lstStyle/>
+          <a:p>
+            <a:pPr algn="l">
+              <a:defRPr sz="2400" b="1">
+                <a:solidFill>
+                  <a:srgbClr val="2A7A4B"/>
+                </a:solidFill>
+                <a:latin typeface="Arial"/>
+              </a:defRPr>
+            </a:pPr>
+            <a:r>
+              <a:t>tus padres</a:t>
+            </a:r>
+          </a:p>
+        </p:txBody>
+      </p:sp>
+      <p:sp>
+        <p:nvSpPr>
+          <p:cNvPr id="14" name="TextBox 13"/>
+          <p:cNvSpPr txBox="1"/>
+          <p:nvPr/>
+        </p:nvSpPr>
+        <p:spPr>
+          <a:xfrm>
+            <a:off x="640080" y="4206240"/>
+            <a:ext cx="5029200" cy="548640"/>
+          </a:xfrm>
+          <a:prstGeom prst="rect">
+            <a:avLst/>
+          </a:prstGeom>
+          <a:noFill/>
+        </p:spPr>
+        <p:txBody>
+          <a:bodyPr wrap="none">
+            <a:spAutoFit/>
+          </a:bodyPr>
+          <a:lstStyle/>
+          <a:p>
+            <a:pPr algn="l">
+              <a:defRPr sz="2400" b="1">
+                <a:solidFill>
+                  <a:srgbClr val="C41E3A"/>
+                </a:solidFill>
+                <a:latin typeface="Arial"/>
+              </a:defRPr>
+            </a:pPr>
+            <a:r>
+              <a:t>seine Großeltern</a:t>
+            </a:r>
+          </a:p>
+        </p:txBody>
+      </p:sp>
+      <p:sp>
+        <p:nvSpPr>
+          <p:cNvPr id="15" name="TextBox 14"/>
+          <p:cNvSpPr txBox="1"/>
+          <p:nvPr/>
+        </p:nvSpPr>
+        <p:spPr>
+          <a:xfrm>
+            <a:off x="5943600" y="4206240"/>
+            <a:ext cx="5029200" cy="548640"/>
+          </a:xfrm>
+          <a:prstGeom prst="rect">
+            <a:avLst/>
+          </a:prstGeom>
+          <a:noFill/>
+        </p:spPr>
+        <p:txBody>
+          <a:bodyPr wrap="none">
+            <a:spAutoFit/>
+          </a:bodyPr>
+          <a:lstStyle/>
+          <a:p>
+            <a:pPr algn="l">
+              <a:defRPr sz="2400" b="1">
+                <a:solidFill>
+                  <a:srgbClr val="2A7A4B"/>
+                </a:solidFill>
+                <a:latin typeface="Arial"/>
+              </a:defRPr>
+            </a:pPr>
+            <a:r>
+              <a:t>sus abuelos</a:t>
+            </a:r>
+          </a:p>
+        </p:txBody>
+      </p:sp>
+    </p:spTree>
+  </p:cSld>
+  <p:clrMapOvr>
+    <a:masterClrMapping/>
+  </p:clrMapOvr>
+</p:sld>
+</file>
+
+<file path=ppt/slides/slide11.xml><?xml version="1.0" encoding="utf-8"?>
+<p:sld xmlns:a="http://schemas.openxmlformats.org/drawingml/2006/main" xmlns:p="http://schemas.openxmlformats.org/presentationml/2006/main" xmlns:r="http://schemas.openxmlformats.org/officeDocument/2006/relationships">
+  <p:cSld>
+    <p:spTree>
+      <p:nvGrpSpPr>
+        <p:cNvPr id="1" name=""/>
+        <p:cNvGrpSpPr/>
+        <p:nvPr/>
+      </p:nvGrpSpPr>
+      <p:grpSpPr/>
+      <p:sp>
+        <p:nvSpPr>
+          <p:cNvPr id="2" name="Rectangle 1"/>
+          <p:cNvSpPr/>
+          <p:nvPr/>
+        </p:nvSpPr>
+        <p:spPr>
+          <a:xfrm>
+            <a:off x="0" y="0"/>
+            <a:ext cx="12191695" cy="457200"/>
+          </a:xfrm>
+          <a:prstGeom prst="rect">
+            <a:avLst/>
+          </a:prstGeom>
+          <a:solidFill>
+            <a:srgbClr val="C41E3A"/>
+          </a:solidFill>
+          <a:ln>
+            <a:noFill/>
+          </a:ln>
+        </p:spPr>
+        <p:style>
+          <a:lnRef idx="1">
+            <a:schemeClr val="accent1"/>
+          </a:lnRef>
+          <a:fillRef idx="3">
+            <a:schemeClr val="accent1"/>
+          </a:fillRef>
+          <a:effectRef idx="2">
+            <a:schemeClr val="accent1"/>
+          </a:effectRef>
+          <a:fontRef idx="minor">
+            <a:schemeClr val="lt1"/>
+          </a:fontRef>
+        </p:style>
+        <p:txBody>
+          <a:bodyPr rtlCol="0" anchor="ctr"/>
+          <a:lstStyle/>
+          <a:p>
+            <a:pPr algn="ctr"/>
+          </a:p>
+        </p:txBody>
+      </p:sp>
+      <p:sp>
+        <p:nvSpPr>
+          <p:cNvPr id="3" name="TextBox 2"/>
+          <p:cNvSpPr txBox="1"/>
+          <p:nvPr/>
+        </p:nvSpPr>
+        <p:spPr>
+          <a:xfrm>
+            <a:off x="274320" y="91440"/>
+            <a:ext cx="3657600" cy="274320"/>
+          </a:xfrm>
+          <a:prstGeom prst="rect">
+            <a:avLst/>
+          </a:prstGeom>
+          <a:noFill/>
+        </p:spPr>
+        <p:txBody>
+          <a:bodyPr wrap="none">
+            <a:spAutoFit/>
+          </a:bodyPr>
+          <a:lstStyle/>
+          <a:p>
+            <a:pPr algn="l">
+              <a:defRPr sz="1400" b="1">
+                <a:solidFill>
+                  <a:srgbClr val="FFFFFF"/>
+                </a:solidFill>
+                <a:latin typeface="Arial"/>
+              </a:defRPr>
+            </a:pPr>
+            <a:r>
+              <a:t>Spanisch Klasse 7 · LP-02c</a:t>
+            </a:r>
+          </a:p>
+        </p:txBody>
+      </p:sp>
+      <p:sp>
+        <p:nvSpPr>
+          <p:cNvPr id="4" name="Rectangle 3"/>
+          <p:cNvSpPr/>
+          <p:nvPr/>
+        </p:nvSpPr>
+        <p:spPr>
+          <a:xfrm>
+            <a:off x="0" y="6583680"/>
+            <a:ext cx="12191695" cy="274320"/>
+          </a:xfrm>
+          <a:prstGeom prst="rect">
+            <a:avLst/>
+          </a:prstGeom>
+          <a:solidFill>
+            <a:srgbClr val="F5F5F5"/>
+          </a:solidFill>
+          <a:ln>
+            <a:noFill/>
+          </a:ln>
+        </p:spPr>
+        <p:style>
+          <a:lnRef idx="1">
+            <a:schemeClr val="accent1"/>
+          </a:lnRef>
+          <a:fillRef idx="3">
+            <a:schemeClr val="accent1"/>
+          </a:fillRef>
+          <a:effectRef idx="2">
+            <a:schemeClr val="accent1"/>
+          </a:effectRef>
+          <a:fontRef idx="minor">
+            <a:schemeClr val="lt1"/>
+          </a:fontRef>
+        </p:style>
+        <p:txBody>
+          <a:bodyPr rtlCol="0" anchor="ctr"/>
+          <a:lstStyle/>
+          <a:p>
+            <a:pPr algn="ctr"/>
+          </a:p>
+        </p:txBody>
+      </p:sp>
+      <p:sp>
+        <p:nvSpPr>
+          <p:cNvPr id="5" name="TextBox 4"/>
+          <p:cNvSpPr txBox="1"/>
+          <p:nvPr/>
+        </p:nvSpPr>
+        <p:spPr>
+          <a:xfrm>
+            <a:off x="274320" y="6601968"/>
+            <a:ext cx="4572000" cy="228600"/>
+          </a:xfrm>
+          <a:prstGeom prst="rect">
+            <a:avLst/>
+          </a:prstGeom>
+          <a:noFill/>
+        </p:spPr>
+        <p:txBody>
+          <a:bodyPr wrap="none">
+            <a:spAutoFit/>
+          </a:bodyPr>
+          <a:lstStyle/>
+          <a:p>
+            <a:pPr algn="l">
+              <a:defRPr sz="1000" b="0">
+                <a:solidFill>
+                  <a:srgbClr val="555555"/>
+                </a:solidFill>
+                <a:latin typeface="Arial"/>
+              </a:defRPr>
+            </a:pPr>
+            <a:r>
+              <a:t>Mi familia</a:t>
+            </a:r>
+          </a:p>
+        </p:txBody>
+      </p:sp>
+      <p:sp>
+        <p:nvSpPr>
+          <p:cNvPr id="6" name="TextBox 5"/>
+          <p:cNvSpPr txBox="1"/>
+          <p:nvPr/>
+        </p:nvSpPr>
+        <p:spPr>
+          <a:xfrm>
+            <a:off x="9144000" y="6601968"/>
+            <a:ext cx="2743200" cy="228600"/>
+          </a:xfrm>
+          <a:prstGeom prst="rect">
+            <a:avLst/>
+          </a:prstGeom>
+          <a:noFill/>
+        </p:spPr>
+        <p:txBody>
+          <a:bodyPr wrap="none">
+            <a:spAutoFit/>
+          </a:bodyPr>
+          <a:lstStyle/>
+          <a:p>
+            <a:pPr algn="r">
+              <a:defRPr sz="1000" b="0">
+                <a:solidFill>
+                  <a:srgbClr val="555555"/>
+                </a:solidFill>
+                <a:latin typeface="Arial"/>
+              </a:defRPr>
+            </a:pPr>
+            <a:r>
+              <a:t>Sequenz 2</a:t>
+            </a:r>
+          </a:p>
+        </p:txBody>
+      </p:sp>
+      <p:sp>
+        <p:nvSpPr>
+          <p:cNvPr id="7" name="Rectangle 6"/>
+          <p:cNvSpPr/>
+          <p:nvPr/>
+        </p:nvSpPr>
+        <p:spPr>
+          <a:xfrm>
+            <a:off x="457200" y="640080"/>
+            <a:ext cx="1828800" cy="457200"/>
+          </a:xfrm>
+          <a:prstGeom prst="rect">
+            <a:avLst/>
+          </a:prstGeom>
+          <a:solidFill>
+            <a:srgbClr val="C41E3A"/>
+          </a:solidFill>
+          <a:ln>
+            <a:noFill/>
+          </a:ln>
+        </p:spPr>
+        <p:style>
+          <a:lnRef idx="1">
+            <a:schemeClr val="accent1"/>
+          </a:lnRef>
+          <a:fillRef idx="3">
+            <a:schemeClr val="accent1"/>
+          </a:fillRef>
+          <a:effectRef idx="2">
+            <a:schemeClr val="accent1"/>
+          </a:effectRef>
+          <a:fontRef idx="minor">
+            <a:schemeClr val="lt1"/>
+          </a:fontRef>
+        </p:style>
+        <p:txBody>
+          <a:bodyPr rtlCol="0" anchor="ctr"/>
+          <a:lstStyle/>
+          <a:p>
+            <a:pPr algn="ctr"/>
+          </a:p>
+        </p:txBody>
+      </p:sp>
+      <p:sp>
+        <p:nvSpPr>
+          <p:cNvPr id="8" name="TextBox 7"/>
+          <p:cNvSpPr txBox="1"/>
+          <p:nvPr/>
+        </p:nvSpPr>
+        <p:spPr>
+          <a:xfrm>
+            <a:off x="548640" y="713231"/>
+            <a:ext cx="1645920" cy="320040"/>
+          </a:xfrm>
+          <a:prstGeom prst="rect">
+            <a:avLst/>
+          </a:prstGeom>
+          <a:noFill/>
+        </p:spPr>
+        <p:txBody>
+          <a:bodyPr wrap="none">
+            <a:spAutoFit/>
+          </a:bodyPr>
+          <a:lstStyle/>
+          <a:p>
+            <a:pPr algn="ctr">
+              <a:defRPr sz="1400" b="1">
+                <a:solidFill>
+                  <a:srgbClr val="FFFFFF"/>
+                </a:solidFill>
+                <a:latin typeface="Arial"/>
+              </a:defRPr>
+            </a:pPr>
+            <a:r>
+              <a:t>ÜBUNG</a:t>
+            </a:r>
+          </a:p>
+        </p:txBody>
+      </p:sp>
+      <p:sp>
+        <p:nvSpPr>
+          <p:cNvPr id="9" name="TextBox 8"/>
+          <p:cNvSpPr txBox="1"/>
+          <p:nvPr/>
+        </p:nvSpPr>
+        <p:spPr>
+          <a:xfrm>
+            <a:off x="457200" y="1280160"/>
+            <a:ext cx="11274552" cy="731520"/>
+          </a:xfrm>
+          <a:prstGeom prst="rect">
+            <a:avLst/>
+          </a:prstGeom>
+          <a:noFill/>
+        </p:spPr>
+        <p:txBody>
+          <a:bodyPr wrap="none">
+            <a:spAutoFit/>
+          </a:bodyPr>
+          <a:lstStyle/>
+          <a:p>
+            <a:pPr algn="l">
+              <a:defRPr sz="3200" b="1">
+                <a:solidFill>
+                  <a:srgbClr val="C41E3A"/>
+                </a:solidFill>
+                <a:latin typeface="Arial"/>
+              </a:defRPr>
+            </a:pPr>
+            <a:r>
+              <a:t>✏️ Übung: Übersetzen</a:t>
+            </a:r>
+          </a:p>
+        </p:txBody>
+      </p:sp>
+      <p:sp>
+        <p:nvSpPr>
+          <p:cNvPr id="10" name="TextBox 9"/>
+          <p:cNvSpPr txBox="1"/>
+          <p:nvPr/>
+        </p:nvSpPr>
+        <p:spPr>
+          <a:xfrm>
+            <a:off x="640080" y="2011680"/>
+            <a:ext cx="5029200" cy="548640"/>
+          </a:xfrm>
+          <a:prstGeom prst="rect">
+            <a:avLst/>
+          </a:prstGeom>
+          <a:noFill/>
+        </p:spPr>
+        <p:txBody>
+          <a:bodyPr wrap="none">
+            <a:spAutoFit/>
+          </a:bodyPr>
+          <a:lstStyle/>
+          <a:p>
+            <a:pPr algn="l">
+              <a:defRPr sz="2200" b="1">
+                <a:solidFill>
+                  <a:srgbClr val="C41E3A"/>
+                </a:solidFill>
+                <a:latin typeface="Arial"/>
+              </a:defRPr>
+            </a:pPr>
+            <a:r>
+              <a:t>Mein Bruder heißt Max.</a:t>
+            </a:r>
+          </a:p>
+        </p:txBody>
+      </p:sp>
+      <p:sp>
+        <p:nvSpPr>
+          <p:cNvPr id="11" name="TextBox 10"/>
+          <p:cNvSpPr txBox="1"/>
+          <p:nvPr/>
+        </p:nvSpPr>
+        <p:spPr>
+          <a:xfrm>
+            <a:off x="5943600" y="2011680"/>
+            <a:ext cx="5029200" cy="548640"/>
+          </a:xfrm>
+          <a:prstGeom prst="rect">
+            <a:avLst/>
+          </a:prstGeom>
+          <a:noFill/>
+        </p:spPr>
+        <p:txBody>
+          <a:bodyPr wrap="none">
+            <a:spAutoFit/>
+          </a:bodyPr>
+          <a:lstStyle/>
+          <a:p>
+            <a:pPr algn="l">
+              <a:defRPr sz="2200" b="0">
+                <a:solidFill>
+                  <a:srgbClr val="888888"/>
+                </a:solidFill>
+                <a:latin typeface="Arial"/>
+              </a:defRPr>
+            </a:pPr>
+            <a:r>
+              <a:t>___</a:t>
+            </a:r>
+          </a:p>
+        </p:txBody>
+      </p:sp>
+      <p:sp>
+        <p:nvSpPr>
+          <p:cNvPr id="12" name="TextBox 11"/>
+          <p:cNvSpPr txBox="1"/>
+          <p:nvPr/>
+        </p:nvSpPr>
+        <p:spPr>
+          <a:xfrm>
+            <a:off x="640080" y="2926080"/>
+            <a:ext cx="5029200" cy="548640"/>
+          </a:xfrm>
+          <a:prstGeom prst="rect">
+            <a:avLst/>
+          </a:prstGeom>
+          <a:noFill/>
+        </p:spPr>
+        <p:txBody>
+          <a:bodyPr wrap="none">
+            <a:spAutoFit/>
+          </a:bodyPr>
+          <a:lstStyle/>
+          <a:p>
+            <a:pPr algn="l">
+              <a:defRPr sz="2200" b="1">
+                <a:solidFill>
+                  <a:srgbClr val="C41E3A"/>
+                </a:solidFill>
+                <a:latin typeface="Arial"/>
+              </a:defRPr>
+            </a:pPr>
+            <a:r>
+              <a:t>Deine Eltern sind nett.</a:t>
+            </a:r>
+          </a:p>
+        </p:txBody>
+      </p:sp>
+      <p:sp>
+        <p:nvSpPr>
+          <p:cNvPr id="13" name="TextBox 12"/>
+          <p:cNvSpPr txBox="1"/>
+          <p:nvPr/>
+        </p:nvSpPr>
+        <p:spPr>
+          <a:xfrm>
+            <a:off x="5943600" y="2926080"/>
+            <a:ext cx="5029200" cy="548640"/>
+          </a:xfrm>
+          <a:prstGeom prst="rect">
+            <a:avLst/>
+          </a:prstGeom>
+          <a:noFill/>
+        </p:spPr>
+        <p:txBody>
+          <a:bodyPr wrap="none">
+            <a:spAutoFit/>
+          </a:bodyPr>
+          <a:lstStyle/>
+          <a:p>
+            <a:pPr algn="l">
+              <a:defRPr sz="2200" b="0">
+                <a:solidFill>
+                  <a:srgbClr val="888888"/>
+                </a:solidFill>
+                <a:latin typeface="Arial"/>
+              </a:defRPr>
+            </a:pPr>
+            <a:r>
+              <a:t>___</a:t>
+            </a:r>
+          </a:p>
+        </p:txBody>
+      </p:sp>
+      <p:sp>
+        <p:nvSpPr>
+          <p:cNvPr id="14" name="Rectangle 13"/>
+          <p:cNvSpPr/>
+          <p:nvPr/>
+        </p:nvSpPr>
+        <p:spPr>
+          <a:xfrm>
+            <a:off x="457200" y="5943600"/>
+            <a:ext cx="11274552" cy="548640"/>
+          </a:xfrm>
+          <a:prstGeom prst="rect">
+            <a:avLst/>
+          </a:prstGeom>
+          <a:solidFill>
+            <a:srgbClr val="FDF2F4"/>
+          </a:solidFill>
+          <a:ln>
+            <a:solidFill>
+              <a:srgbClr val="C41E3A"/>
+            </a:solidFill>
+          </a:ln>
+        </p:spPr>
+        <p:style>
+          <a:lnRef idx="1">
+            <a:schemeClr val="accent1"/>
+          </a:lnRef>
+          <a:fillRef idx="3">
+            <a:schemeClr val="accent1"/>
+          </a:fillRef>
+          <a:effectRef idx="2">
+            <a:schemeClr val="accent1"/>
+          </a:effectRef>
+          <a:fontRef idx="minor">
+            <a:schemeClr val="lt1"/>
+          </a:fontRef>
+        </p:style>
+        <p:txBody>
+          <a:bodyPr rtlCol="0" anchor="ctr"/>
+          <a:lstStyle/>
+          <a:p>
+            <a:pPr algn="ctr"/>
+          </a:p>
+        </p:txBody>
+      </p:sp>
+      <p:sp>
+        <p:nvSpPr>
+          <p:cNvPr id="15" name="TextBox 14"/>
+          <p:cNvSpPr txBox="1"/>
+          <p:nvPr/>
+        </p:nvSpPr>
+        <p:spPr>
+          <a:xfrm>
+            <a:off x="640080" y="6053328"/>
+            <a:ext cx="10972800" cy="365760"/>
+          </a:xfrm>
+          <a:prstGeom prst="rect">
+            <a:avLst/>
+          </a:prstGeom>
+          <a:noFill/>
+        </p:spPr>
+        <p:txBody>
+          <a:bodyPr wrap="none">
+            <a:spAutoFit/>
+          </a:bodyPr>
+          <a:lstStyle/>
+          <a:p>
+            <a:pPr algn="l">
+              <a:defRPr sz="1400" b="1">
+                <a:solidFill>
+                  <a:srgbClr val="C41E3A"/>
+                </a:solidFill>
+                <a:latin typeface="Arial"/>
+              </a:defRPr>
+            </a:pPr>
+            <a:r>
+              <a:t>📝 AB-02c: Aufgabe 3</a:t>
+            </a:r>
+          </a:p>
+        </p:txBody>
+      </p:sp>
+    </p:spTree>
+  </p:cSld>
+  <p:clrMapOvr>
+    <a:masterClrMapping/>
+  </p:clrMapOvr>
+</p:sld>
+</file>
+
+<file path=ppt/slides/slide12.xml><?xml version="1.0" encoding="utf-8"?>
+<p:sld xmlns:a="http://schemas.openxmlformats.org/drawingml/2006/main" xmlns:p="http://schemas.openxmlformats.org/presentationml/2006/main" xmlns:r="http://schemas.openxmlformats.org/officeDocument/2006/relationships">
+  <p:cSld>
+    <p:spTree>
+      <p:nvGrpSpPr>
+        <p:cNvPr id="1" name=""/>
+        <p:cNvGrpSpPr/>
+        <p:nvPr/>
+      </p:nvGrpSpPr>
+      <p:grpSpPr/>
+      <p:sp>
+        <p:nvSpPr>
+          <p:cNvPr id="2" name="Rectangle 1"/>
+          <p:cNvSpPr/>
+          <p:nvPr/>
+        </p:nvSpPr>
+        <p:spPr>
+          <a:xfrm>
+            <a:off x="0" y="0"/>
+            <a:ext cx="12191695" cy="457200"/>
+          </a:xfrm>
+          <a:prstGeom prst="rect">
+            <a:avLst/>
+          </a:prstGeom>
+          <a:solidFill>
+            <a:srgbClr val="C41E3A"/>
+          </a:solidFill>
+          <a:ln>
+            <a:noFill/>
+          </a:ln>
+        </p:spPr>
+        <p:style>
+          <a:lnRef idx="1">
+            <a:schemeClr val="accent1"/>
+          </a:lnRef>
+          <a:fillRef idx="3">
+            <a:schemeClr val="accent1"/>
+          </a:fillRef>
+          <a:effectRef idx="2">
+            <a:schemeClr val="accent1"/>
+          </a:effectRef>
+          <a:fontRef idx="minor">
+            <a:schemeClr val="lt1"/>
+          </a:fontRef>
+        </p:style>
+        <p:txBody>
+          <a:bodyPr rtlCol="0" anchor="ctr"/>
+          <a:lstStyle/>
+          <a:p>
+            <a:pPr algn="ctr"/>
+          </a:p>
+        </p:txBody>
+      </p:sp>
+      <p:sp>
+        <p:nvSpPr>
+          <p:cNvPr id="3" name="TextBox 2"/>
+          <p:cNvSpPr txBox="1"/>
+          <p:nvPr/>
+        </p:nvSpPr>
+        <p:spPr>
+          <a:xfrm>
+            <a:off x="274320" y="91440"/>
+            <a:ext cx="3657600" cy="274320"/>
+          </a:xfrm>
+          <a:prstGeom prst="rect">
+            <a:avLst/>
+          </a:prstGeom>
+          <a:noFill/>
+        </p:spPr>
+        <p:txBody>
+          <a:bodyPr wrap="none">
+            <a:spAutoFit/>
+          </a:bodyPr>
+          <a:lstStyle/>
+          <a:p>
+            <a:pPr algn="l">
+              <a:defRPr sz="1400" b="1">
+                <a:solidFill>
+                  <a:srgbClr val="FFFFFF"/>
+                </a:solidFill>
+                <a:latin typeface="Arial"/>
+              </a:defRPr>
+            </a:pPr>
+            <a:r>
+              <a:t>Spanisch Klasse 7 · LP-02c</a:t>
+            </a:r>
+          </a:p>
+        </p:txBody>
+      </p:sp>
+      <p:sp>
+        <p:nvSpPr>
+          <p:cNvPr id="4" name="Rectangle 3"/>
+          <p:cNvSpPr/>
+          <p:nvPr/>
+        </p:nvSpPr>
+        <p:spPr>
+          <a:xfrm>
+            <a:off x="0" y="6583680"/>
+            <a:ext cx="12191695" cy="274320"/>
+          </a:xfrm>
+          <a:prstGeom prst="rect">
+            <a:avLst/>
+          </a:prstGeom>
+          <a:solidFill>
+            <a:srgbClr val="F5F5F5"/>
+          </a:solidFill>
+          <a:ln>
+            <a:noFill/>
+          </a:ln>
+        </p:spPr>
+        <p:style>
+          <a:lnRef idx="1">
+            <a:schemeClr val="accent1"/>
+          </a:lnRef>
+          <a:fillRef idx="3">
+            <a:schemeClr val="accent1"/>
+          </a:fillRef>
+          <a:effectRef idx="2">
+            <a:schemeClr val="accent1"/>
+          </a:effectRef>
+          <a:fontRef idx="minor">
+            <a:schemeClr val="lt1"/>
+          </a:fontRef>
+        </p:style>
+        <p:txBody>
+          <a:bodyPr rtlCol="0" anchor="ctr"/>
+          <a:lstStyle/>
+          <a:p>
+            <a:pPr algn="ctr"/>
+          </a:p>
+        </p:txBody>
+      </p:sp>
+      <p:sp>
+        <p:nvSpPr>
+          <p:cNvPr id="5" name="TextBox 4"/>
+          <p:cNvSpPr txBox="1"/>
+          <p:nvPr/>
+        </p:nvSpPr>
+        <p:spPr>
+          <a:xfrm>
+            <a:off x="274320" y="6601968"/>
+            <a:ext cx="4572000" cy="228600"/>
+          </a:xfrm>
+          <a:prstGeom prst="rect">
+            <a:avLst/>
+          </a:prstGeom>
+          <a:noFill/>
+        </p:spPr>
+        <p:txBody>
+          <a:bodyPr wrap="none">
+            <a:spAutoFit/>
+          </a:bodyPr>
+          <a:lstStyle/>
+          <a:p>
+            <a:pPr algn="l">
+              <a:defRPr sz="1000" b="0">
+                <a:solidFill>
+                  <a:srgbClr val="555555"/>
+                </a:solidFill>
+                <a:latin typeface="Arial"/>
+              </a:defRPr>
+            </a:pPr>
+            <a:r>
+              <a:t>Mi familia</a:t>
+            </a:r>
+          </a:p>
+        </p:txBody>
+      </p:sp>
+      <p:sp>
+        <p:nvSpPr>
+          <p:cNvPr id="6" name="TextBox 5"/>
+          <p:cNvSpPr txBox="1"/>
+          <p:nvPr/>
+        </p:nvSpPr>
+        <p:spPr>
+          <a:xfrm>
+            <a:off x="9144000" y="6601968"/>
+            <a:ext cx="2743200" cy="228600"/>
+          </a:xfrm>
+          <a:prstGeom prst="rect">
+            <a:avLst/>
+          </a:prstGeom>
+          <a:noFill/>
+        </p:spPr>
+        <p:txBody>
+          <a:bodyPr wrap="none">
+            <a:spAutoFit/>
+          </a:bodyPr>
+          <a:lstStyle/>
+          <a:p>
+            <a:pPr algn="r">
+              <a:defRPr sz="1000" b="0">
+                <a:solidFill>
+                  <a:srgbClr val="555555"/>
+                </a:solidFill>
+                <a:latin typeface="Arial"/>
+              </a:defRPr>
+            </a:pPr>
+            <a:r>
+              <a:t>Sequenz 2</a:t>
+            </a:r>
+          </a:p>
+        </p:txBody>
+      </p:sp>
+      <p:sp>
+        <p:nvSpPr>
+          <p:cNvPr id="7" name="TextBox 6"/>
+          <p:cNvSpPr txBox="1"/>
+          <p:nvPr/>
+        </p:nvSpPr>
+        <p:spPr>
+          <a:xfrm>
+            <a:off x="457200" y="640080"/>
+            <a:ext cx="11274552" cy="731520"/>
+          </a:xfrm>
+          <a:prstGeom prst="rect">
+            <a:avLst/>
+          </a:prstGeom>
+          <a:noFill/>
+        </p:spPr>
+        <p:txBody>
+          <a:bodyPr wrap="none">
+            <a:spAutoFit/>
+          </a:bodyPr>
+          <a:lstStyle/>
+          <a:p>
+            <a:pPr algn="l">
+              <a:defRPr sz="3200" b="1">
+                <a:solidFill>
+                  <a:srgbClr val="C41E3A"/>
+                </a:solidFill>
+                <a:latin typeface="Arial"/>
+              </a:defRPr>
+            </a:pPr>
+            <a:r>
+              <a:t>📋 Zusammenfassung</a:t>
+            </a:r>
+          </a:p>
+        </p:txBody>
+      </p:sp>
+      <p:sp>
+        <p:nvSpPr>
+          <p:cNvPr id="8" name="TextBox 7"/>
+          <p:cNvSpPr txBox="1"/>
+          <p:nvPr/>
+        </p:nvSpPr>
+        <p:spPr>
+          <a:xfrm>
+            <a:off x="640080" y="1463040"/>
+            <a:ext cx="5029200" cy="457200"/>
+          </a:xfrm>
+          <a:prstGeom prst="rect">
+            <a:avLst/>
+          </a:prstGeom>
+          <a:noFill/>
+        </p:spPr>
+        <p:txBody>
+          <a:bodyPr wrap="none">
+            <a:spAutoFit/>
+          </a:bodyPr>
+          <a:lstStyle/>
+          <a:p>
+            <a:pPr algn="l">
+              <a:defRPr sz="2000" b="1">
+                <a:solidFill>
+                  <a:srgbClr val="C41E3A"/>
+                </a:solidFill>
+                <a:latin typeface="Arial"/>
+              </a:defRPr>
+            </a:pPr>
+            <a:r>
+              <a:t>Vokabeln</a:t>
+            </a:r>
+          </a:p>
+        </p:txBody>
+      </p:sp>
+      <p:sp>
+        <p:nvSpPr>
+          <p:cNvPr id="9" name="TextBox 8"/>
+          <p:cNvSpPr txBox="1"/>
+          <p:nvPr/>
+        </p:nvSpPr>
+        <p:spPr>
+          <a:xfrm>
+            <a:off x="822960" y="2011680"/>
+            <a:ext cx="4846320" cy="457200"/>
+          </a:xfrm>
+          <a:prstGeom prst="rect">
+            <a:avLst/>
+          </a:prstGeom>
+          <a:noFill/>
+        </p:spPr>
+        <p:txBody>
+          <a:bodyPr wrap="none">
+            <a:spAutoFit/>
+          </a:bodyPr>
+          <a:lstStyle/>
+          <a:p>
+            <a:pPr algn="l">
+              <a:defRPr sz="1800" b="0">
+                <a:solidFill>
+                  <a:srgbClr val="222222"/>
+                </a:solidFill>
+                <a:latin typeface="Arial"/>
+              </a:defRPr>
+            </a:pPr>
+            <a:r>
+              <a:t>•  mi / mis – mein/e</a:t>
+            </a:r>
+          </a:p>
+        </p:txBody>
+      </p:sp>
+      <p:sp>
+        <p:nvSpPr>
+          <p:cNvPr id="10" name="TextBox 9"/>
+          <p:cNvSpPr txBox="1"/>
+          <p:nvPr/>
+        </p:nvSpPr>
+        <p:spPr>
+          <a:xfrm>
+            <a:off x="822960" y="2560320"/>
+            <a:ext cx="4846320" cy="457200"/>
+          </a:xfrm>
+          <a:prstGeom prst="rect">
+            <a:avLst/>
+          </a:prstGeom>
+          <a:noFill/>
+        </p:spPr>
+        <p:txBody>
+          <a:bodyPr wrap="none">
+            <a:spAutoFit/>
+          </a:bodyPr>
+          <a:lstStyle/>
+          <a:p>
+            <a:pPr algn="l">
+              <a:defRPr sz="1800" b="0">
+                <a:solidFill>
+                  <a:srgbClr val="222222"/>
+                </a:solidFill>
+                <a:latin typeface="Arial"/>
+              </a:defRPr>
+            </a:pPr>
+            <a:r>
+              <a:t>•  tu / tus – dein/e</a:t>
+            </a:r>
+          </a:p>
+        </p:txBody>
+      </p:sp>
+      <p:sp>
+        <p:nvSpPr>
+          <p:cNvPr id="11" name="TextBox 10"/>
+          <p:cNvSpPr txBox="1"/>
+          <p:nvPr/>
+        </p:nvSpPr>
+        <p:spPr>
+          <a:xfrm>
+            <a:off x="822960" y="3108960"/>
+            <a:ext cx="4846320" cy="457200"/>
+          </a:xfrm>
+          <a:prstGeom prst="rect">
+            <a:avLst/>
+          </a:prstGeom>
+          <a:noFill/>
+        </p:spPr>
+        <p:txBody>
+          <a:bodyPr wrap="none">
+            <a:spAutoFit/>
+          </a:bodyPr>
+          <a:lstStyle/>
+          <a:p>
+            <a:pPr algn="l">
+              <a:defRPr sz="1800" b="0">
+                <a:solidFill>
+                  <a:srgbClr val="222222"/>
+                </a:solidFill>
+                <a:latin typeface="Arial"/>
+              </a:defRPr>
+            </a:pPr>
+            <a:r>
+              <a:t>•  su / sus – sein/e</a:t>
+            </a:r>
+          </a:p>
+        </p:txBody>
+      </p:sp>
+      <p:sp>
+        <p:nvSpPr>
+          <p:cNvPr id="12" name="TextBox 11"/>
+          <p:cNvSpPr txBox="1"/>
+          <p:nvPr/>
+        </p:nvSpPr>
+        <p:spPr>
+          <a:xfrm>
+            <a:off x="6400800" y="1463040"/>
+            <a:ext cx="5029200" cy="457200"/>
+          </a:xfrm>
+          <a:prstGeom prst="rect">
+            <a:avLst/>
+          </a:prstGeom>
+          <a:noFill/>
+        </p:spPr>
+        <p:txBody>
+          <a:bodyPr wrap="none">
+            <a:spAutoFit/>
+          </a:bodyPr>
+          <a:lstStyle/>
+          <a:p>
+            <a:pPr algn="l">
+              <a:defRPr sz="2000" b="1">
+                <a:solidFill>
+                  <a:srgbClr val="C41E3A"/>
+                </a:solidFill>
+                <a:latin typeface="Arial"/>
+              </a:defRPr>
+            </a:pPr>
+            <a:r>
+              <a:t>Grammatik</a:t>
+            </a:r>
+          </a:p>
+        </p:txBody>
+      </p:sp>
+      <p:sp>
+        <p:nvSpPr>
+          <p:cNvPr id="13" name="TextBox 12"/>
+          <p:cNvSpPr txBox="1"/>
+          <p:nvPr/>
+        </p:nvSpPr>
+        <p:spPr>
+          <a:xfrm>
+            <a:off x="6583680" y="2011680"/>
+            <a:ext cx="4846320" cy="457200"/>
+          </a:xfrm>
+          <a:prstGeom prst="rect">
+            <a:avLst/>
+          </a:prstGeom>
+          <a:noFill/>
+        </p:spPr>
+        <p:txBody>
+          <a:bodyPr wrap="none">
+            <a:spAutoFit/>
+          </a:bodyPr>
+          <a:lstStyle/>
+          <a:p>
+            <a:pPr algn="l">
+              <a:defRPr sz="1800" b="0">
+                <a:solidFill>
+                  <a:srgbClr val="222222"/>
+                </a:solidFill>
+                <a:latin typeface="Arial"/>
+              </a:defRPr>
+            </a:pPr>
+            <a:r>
+              <a:t>•  Singular: mi, tu, su</a:t>
+            </a:r>
+          </a:p>
+        </p:txBody>
+      </p:sp>
+      <p:sp>
+        <p:nvSpPr>
+          <p:cNvPr id="14" name="TextBox 13"/>
+          <p:cNvSpPr txBox="1"/>
+          <p:nvPr/>
+        </p:nvSpPr>
+        <p:spPr>
+          <a:xfrm>
+            <a:off x="6583680" y="2560320"/>
+            <a:ext cx="4846320" cy="457200"/>
+          </a:xfrm>
+          <a:prstGeom prst="rect">
+            <a:avLst/>
+          </a:prstGeom>
+          <a:noFill/>
+        </p:spPr>
+        <p:txBody>
+          <a:bodyPr wrap="none">
+            <a:spAutoFit/>
+          </a:bodyPr>
+          <a:lstStyle/>
+          <a:p>
+            <a:pPr algn="l">
+              <a:defRPr sz="1800" b="0">
+                <a:solidFill>
+                  <a:srgbClr val="222222"/>
+                </a:solidFill>
+                <a:latin typeface="Arial"/>
+              </a:defRPr>
+            </a:pPr>
+            <a:r>
+              <a:t>•  Plural: mis, tus, sus</a:t>
+            </a:r>
+          </a:p>
+        </p:txBody>
+      </p:sp>
+    </p:spTree>
+  </p:cSld>
+  <p:clrMapOvr>
+    <a:masterClrMapping/>
+  </p:clrMapOvr>
+</p:sld>
+</file>
+
+<file path=ppt/slides/slide13.xml><?xml version="1.0" encoding="utf-8"?>
+<p:sld xmlns:a="http://schemas.openxmlformats.org/drawingml/2006/main" xmlns:p="http://schemas.openxmlformats.org/presentationml/2006/main" xmlns:r="http://schemas.openxmlformats.org/officeDocument/2006/relationships">
+  <p:cSld>
+    <p:spTree>
+      <p:nvGrpSpPr>
+        <p:cNvPr id="1" name=""/>
+        <p:cNvGrpSpPr/>
+        <p:nvPr/>
+      </p:nvGrpSpPr>
+      <p:grpSpPr/>
+      <p:sp>
+        <p:nvSpPr>
+          <p:cNvPr id="2" name="Rectangle 1"/>
+          <p:cNvSpPr/>
+          <p:nvPr/>
+        </p:nvSpPr>
+        <p:spPr>
+          <a:xfrm>
+            <a:off x="0" y="0"/>
+            <a:ext cx="12191695" cy="457200"/>
+          </a:xfrm>
+          <a:prstGeom prst="rect">
+            <a:avLst/>
+          </a:prstGeom>
+          <a:solidFill>
+            <a:srgbClr val="C41E3A"/>
+          </a:solidFill>
+          <a:ln>
+            <a:noFill/>
+          </a:ln>
+        </p:spPr>
+        <p:style>
+          <a:lnRef idx="1">
+            <a:schemeClr val="accent1"/>
+          </a:lnRef>
+          <a:fillRef idx="3">
+            <a:schemeClr val="accent1"/>
+          </a:fillRef>
+          <a:effectRef idx="2">
+            <a:schemeClr val="accent1"/>
+          </a:effectRef>
+          <a:fontRef idx="minor">
+            <a:schemeClr val="lt1"/>
+          </a:fontRef>
+        </p:style>
+        <p:txBody>
+          <a:bodyPr rtlCol="0" anchor="ctr"/>
+          <a:lstStyle/>
+          <a:p>
+            <a:pPr algn="ctr"/>
+          </a:p>
+        </p:txBody>
+      </p:sp>
+      <p:sp>
+        <p:nvSpPr>
+          <p:cNvPr id="3" name="TextBox 2"/>
+          <p:cNvSpPr txBox="1"/>
+          <p:nvPr/>
+        </p:nvSpPr>
+        <p:spPr>
+          <a:xfrm>
+            <a:off x="274320" y="91440"/>
+            <a:ext cx="3657600" cy="274320"/>
+          </a:xfrm>
+          <a:prstGeom prst="rect">
+            <a:avLst/>
+          </a:prstGeom>
+          <a:noFill/>
+        </p:spPr>
+        <p:txBody>
+          <a:bodyPr wrap="none">
+            <a:spAutoFit/>
+          </a:bodyPr>
+          <a:lstStyle/>
+          <a:p>
+            <a:pPr algn="l">
+              <a:defRPr sz="1400" b="1">
+                <a:solidFill>
+                  <a:srgbClr val="FFFFFF"/>
+                </a:solidFill>
+                <a:latin typeface="Arial"/>
+              </a:defRPr>
+            </a:pPr>
+            <a:r>
+              <a:t>Spanisch Klasse 7 · LP-02c</a:t>
+            </a:r>
+          </a:p>
+        </p:txBody>
+      </p:sp>
+      <p:sp>
+        <p:nvSpPr>
+          <p:cNvPr id="4" name="Rectangle 3"/>
+          <p:cNvSpPr/>
+          <p:nvPr/>
+        </p:nvSpPr>
+        <p:spPr>
+          <a:xfrm>
+            <a:off x="0" y="6583680"/>
+            <a:ext cx="12191695" cy="274320"/>
+          </a:xfrm>
+          <a:prstGeom prst="rect">
+            <a:avLst/>
+          </a:prstGeom>
+          <a:solidFill>
+            <a:srgbClr val="F5F5F5"/>
+          </a:solidFill>
+          <a:ln>
+            <a:noFill/>
+          </a:ln>
+        </p:spPr>
+        <p:style>
+          <a:lnRef idx="1">
+            <a:schemeClr val="accent1"/>
+          </a:lnRef>
+          <a:fillRef idx="3">
+            <a:schemeClr val="accent1"/>
+          </a:fillRef>
+          <a:effectRef idx="2">
+            <a:schemeClr val="accent1"/>
+          </a:effectRef>
+          <a:fontRef idx="minor">
+            <a:schemeClr val="lt1"/>
+          </a:fontRef>
+        </p:style>
+        <p:txBody>
+          <a:bodyPr rtlCol="0" anchor="ctr"/>
+          <a:lstStyle/>
+          <a:p>
+            <a:pPr algn="ctr"/>
+          </a:p>
+        </p:txBody>
+      </p:sp>
+      <p:sp>
+        <p:nvSpPr>
+          <p:cNvPr id="5" name="TextBox 4"/>
+          <p:cNvSpPr txBox="1"/>
+          <p:nvPr/>
+        </p:nvSpPr>
+        <p:spPr>
+          <a:xfrm>
+            <a:off x="274320" y="6601968"/>
+            <a:ext cx="4572000" cy="228600"/>
+          </a:xfrm>
+          <a:prstGeom prst="rect">
+            <a:avLst/>
+          </a:prstGeom>
+          <a:noFill/>
+        </p:spPr>
+        <p:txBody>
+          <a:bodyPr wrap="none">
+            <a:spAutoFit/>
+          </a:bodyPr>
+          <a:lstStyle/>
+          <a:p>
+            <a:pPr algn="l">
+              <a:defRPr sz="1000" b="0">
+                <a:solidFill>
+                  <a:srgbClr val="555555"/>
+                </a:solidFill>
+                <a:latin typeface="Arial"/>
+              </a:defRPr>
+            </a:pPr>
+            <a:r>
+              <a:t>Mi familia</a:t>
+            </a:r>
+          </a:p>
+        </p:txBody>
+      </p:sp>
+      <p:sp>
+        <p:nvSpPr>
+          <p:cNvPr id="6" name="TextBox 5"/>
+          <p:cNvSpPr txBox="1"/>
+          <p:nvPr/>
+        </p:nvSpPr>
+        <p:spPr>
+          <a:xfrm>
+            <a:off x="9144000" y="6601968"/>
+            <a:ext cx="2743200" cy="228600"/>
+          </a:xfrm>
+          <a:prstGeom prst="rect">
+            <a:avLst/>
+          </a:prstGeom>
+          <a:noFill/>
+        </p:spPr>
+        <p:txBody>
+          <a:bodyPr wrap="none">
+            <a:spAutoFit/>
+          </a:bodyPr>
+          <a:lstStyle/>
+          <a:p>
+            <a:pPr algn="r">
+              <a:defRPr sz="1000" b="0">
+                <a:solidFill>
+                  <a:srgbClr val="555555"/>
+                </a:solidFill>
+                <a:latin typeface="Arial"/>
+              </a:defRPr>
+            </a:pPr>
+            <a:r>
+              <a:t>Sequenz 2</a:t>
+            </a:r>
+          </a:p>
+        </p:txBody>
+      </p:sp>
+      <p:sp>
+        <p:nvSpPr>
+          <p:cNvPr id="7" name="Rectangle 6"/>
+          <p:cNvSpPr/>
+          <p:nvPr/>
+        </p:nvSpPr>
+        <p:spPr>
+          <a:xfrm>
+            <a:off x="457200" y="640080"/>
+            <a:ext cx="1828800" cy="457200"/>
+          </a:xfrm>
+          <a:prstGeom prst="rect">
+            <a:avLst/>
+          </a:prstGeom>
+          <a:solidFill>
+            <a:srgbClr val="C41E3A"/>
+          </a:solidFill>
+          <a:ln>
+            <a:noFill/>
+          </a:ln>
+        </p:spPr>
+        <p:style>
+          <a:lnRef idx="1">
+            <a:schemeClr val="accent1"/>
+          </a:lnRef>
+          <a:fillRef idx="3">
+            <a:schemeClr val="accent1"/>
+          </a:fillRef>
+          <a:effectRef idx="2">
+            <a:schemeClr val="accent1"/>
+          </a:effectRef>
+          <a:fontRef idx="minor">
+            <a:schemeClr val="lt1"/>
+          </a:fontRef>
+        </p:style>
+        <p:txBody>
+          <a:bodyPr rtlCol="0" anchor="ctr"/>
+          <a:lstStyle/>
+          <a:p>
+            <a:pPr algn="ctr"/>
+          </a:p>
+        </p:txBody>
+      </p:sp>
+      <p:sp>
+        <p:nvSpPr>
+          <p:cNvPr id="8" name="TextBox 7"/>
+          <p:cNvSpPr txBox="1"/>
+          <p:nvPr/>
+        </p:nvSpPr>
+        <p:spPr>
+          <a:xfrm>
+            <a:off x="548640" y="713231"/>
+            <a:ext cx="1645920" cy="320040"/>
+          </a:xfrm>
+          <a:prstGeom prst="rect">
+            <a:avLst/>
+          </a:prstGeom>
+          <a:noFill/>
+        </p:spPr>
+        <p:txBody>
+          <a:bodyPr wrap="none">
+            <a:spAutoFit/>
+          </a:bodyPr>
+          <a:lstStyle/>
+          <a:p>
+            <a:pPr algn="ctr">
+              <a:defRPr sz="1400" b="1">
+                <a:solidFill>
+                  <a:srgbClr val="FFFFFF"/>
+                </a:solidFill>
+                <a:latin typeface="Arial"/>
+              </a:defRPr>
+            </a:pPr>
+            <a:r>
+              <a:t>HAUSAUFGABE</a:t>
+            </a:r>
+          </a:p>
+        </p:txBody>
+      </p:sp>
+      <p:sp>
+        <p:nvSpPr>
+          <p:cNvPr id="9" name="TextBox 8"/>
+          <p:cNvSpPr txBox="1"/>
+          <p:nvPr/>
+        </p:nvSpPr>
+        <p:spPr>
+          <a:xfrm>
+            <a:off x="457200" y="1280160"/>
+            <a:ext cx="11274552" cy="731520"/>
+          </a:xfrm>
+          <a:prstGeom prst="rect">
+            <a:avLst/>
+          </a:prstGeom>
+          <a:noFill/>
+        </p:spPr>
+        <p:txBody>
+          <a:bodyPr wrap="none">
+            <a:spAutoFit/>
+          </a:bodyPr>
+          <a:lstStyle/>
+          <a:p>
+            <a:pPr algn="l">
+              <a:defRPr sz="3200" b="1">
+                <a:solidFill>
+                  <a:srgbClr val="C41E3A"/>
+                </a:solidFill>
+                <a:latin typeface="Arial"/>
+              </a:defRPr>
+            </a:pPr>
+            <a:r>
+              <a:t>📚 Para casa</a:t>
+            </a:r>
+          </a:p>
+        </p:txBody>
+      </p:sp>
+      <p:sp>
+        <p:nvSpPr>
+          <p:cNvPr id="10" name="TextBox 9"/>
+          <p:cNvSpPr txBox="1"/>
+          <p:nvPr/>
+        </p:nvSpPr>
+        <p:spPr>
+          <a:xfrm>
+            <a:off x="640080" y="2103120"/>
+            <a:ext cx="457200" cy="457200"/>
+          </a:xfrm>
+          <a:prstGeom prst="rect">
+            <a:avLst/>
+          </a:prstGeom>
+          <a:noFill/>
+        </p:spPr>
+        <p:txBody>
+          <a:bodyPr wrap="none">
+            <a:spAutoFit/>
+          </a:bodyPr>
+          <a:lstStyle/>
+          <a:p>
+            <a:pPr algn="l">
+              <a:defRPr sz="2400" b="1">
+                <a:solidFill>
+                  <a:srgbClr val="2A7A4B"/>
+                </a:solidFill>
+                <a:latin typeface="Arial"/>
+              </a:defRPr>
+            </a:pPr>
+            <a:r>
+              <a:t>✓</a:t>
+            </a:r>
+          </a:p>
+        </p:txBody>
+      </p:sp>
+      <p:sp>
+        <p:nvSpPr>
+          <p:cNvPr id="11" name="TextBox 10"/>
+          <p:cNvSpPr txBox="1"/>
+          <p:nvPr/>
+        </p:nvSpPr>
+        <p:spPr>
+          <a:xfrm>
+            <a:off x="1188720" y="2103120"/>
+            <a:ext cx="10058400" cy="457200"/>
+          </a:xfrm>
+          <a:prstGeom prst="rect">
+            <a:avLst/>
+          </a:prstGeom>
+          <a:noFill/>
+        </p:spPr>
+        <p:txBody>
+          <a:bodyPr wrap="none">
+            <a:spAutoFit/>
+          </a:bodyPr>
+          <a:lstStyle/>
+          <a:p>
+            <a:pPr algn="l">
+              <a:defRPr sz="2000" b="0">
+                <a:solidFill>
+                  <a:srgbClr val="222222"/>
+                </a:solidFill>
+                <a:latin typeface="Arial"/>
+              </a:defRPr>
+            </a:pPr>
+            <a:r>
+              <a:t>Possessivbegleiter lernen</a:t>
+            </a:r>
+          </a:p>
+        </p:txBody>
+      </p:sp>
+      <p:sp>
+        <p:nvSpPr>
+          <p:cNvPr id="12" name="TextBox 11"/>
+          <p:cNvSpPr txBox="1"/>
+          <p:nvPr/>
+        </p:nvSpPr>
+        <p:spPr>
+          <a:xfrm>
+            <a:off x="640080" y="2926079"/>
+            <a:ext cx="457200" cy="457200"/>
+          </a:xfrm>
+          <a:prstGeom prst="rect">
+            <a:avLst/>
+          </a:prstGeom>
+          <a:noFill/>
+        </p:spPr>
+        <p:txBody>
+          <a:bodyPr wrap="none">
+            <a:spAutoFit/>
+          </a:bodyPr>
+          <a:lstStyle/>
+          <a:p>
+            <a:pPr algn="l">
+              <a:defRPr sz="2400" b="1">
+                <a:solidFill>
+                  <a:srgbClr val="2A7A4B"/>
+                </a:solidFill>
+                <a:latin typeface="Arial"/>
+              </a:defRPr>
+            </a:pPr>
+            <a:r>
+              <a:t>✓</a:t>
+            </a:r>
+          </a:p>
+        </p:txBody>
+      </p:sp>
+      <p:sp>
+        <p:nvSpPr>
+          <p:cNvPr id="13" name="TextBox 12"/>
+          <p:cNvSpPr txBox="1"/>
+          <p:nvPr/>
+        </p:nvSpPr>
+        <p:spPr>
+          <a:xfrm>
+            <a:off x="1188720" y="2926079"/>
+            <a:ext cx="10058400" cy="457200"/>
+          </a:xfrm>
+          <a:prstGeom prst="rect">
+            <a:avLst/>
+          </a:prstGeom>
+          <a:noFill/>
+        </p:spPr>
+        <p:txBody>
+          <a:bodyPr wrap="none">
+            <a:spAutoFit/>
+          </a:bodyPr>
+          <a:lstStyle/>
+          <a:p>
+            <a:pPr algn="l">
+              <a:defRPr sz="2000" b="0">
+                <a:solidFill>
+                  <a:srgbClr val="222222"/>
+                </a:solidFill>
+                <a:latin typeface="Arial"/>
+              </a:defRPr>
+            </a:pPr>
+            <a:r>
+              <a:t>Deine Familie beschreiben (5 Sätze)</a:t>
+            </a:r>
+          </a:p>
+        </p:txBody>
+      </p:sp>
+      <p:sp>
+        <p:nvSpPr>
+          <p:cNvPr id="14" name="TextBox 13"/>
+          <p:cNvSpPr txBox="1"/>
+          <p:nvPr/>
+        </p:nvSpPr>
+        <p:spPr>
+          <a:xfrm>
+            <a:off x="640080" y="3749039"/>
+            <a:ext cx="457200" cy="457200"/>
+          </a:xfrm>
+          <a:prstGeom prst="rect">
+            <a:avLst/>
+          </a:prstGeom>
+          <a:noFill/>
+        </p:spPr>
+        <p:txBody>
+          <a:bodyPr wrap="none">
+            <a:spAutoFit/>
+          </a:bodyPr>
+          <a:lstStyle/>
+          <a:p>
+            <a:pPr algn="l">
+              <a:defRPr sz="2400" b="1">
+                <a:solidFill>
+                  <a:srgbClr val="2A7A4B"/>
+                </a:solidFill>
+                <a:latin typeface="Arial"/>
+              </a:defRPr>
+            </a:pPr>
+            <a:r>
+              <a:t>✓</a:t>
+            </a:r>
+          </a:p>
+        </p:txBody>
+      </p:sp>
+      <p:sp>
+        <p:nvSpPr>
+          <p:cNvPr id="15" name="TextBox 14"/>
+          <p:cNvSpPr txBox="1"/>
+          <p:nvPr/>
+        </p:nvSpPr>
+        <p:spPr>
+          <a:xfrm>
+            <a:off x="1188720" y="3749039"/>
+            <a:ext cx="10058400" cy="457200"/>
+          </a:xfrm>
+          <a:prstGeom prst="rect">
+            <a:avLst/>
+          </a:prstGeom>
+          <a:noFill/>
+        </p:spPr>
+        <p:txBody>
+          <a:bodyPr wrap="none">
+            <a:spAutoFit/>
+          </a:bodyPr>
+          <a:lstStyle/>
+          <a:p>
+            <a:pPr algn="l">
+              <a:defRPr sz="2000" b="0">
+                <a:solidFill>
+                  <a:srgbClr val="222222"/>
+                </a:solidFill>
+                <a:latin typeface="Arial"/>
+              </a:defRPr>
+            </a:pPr>
+            <a:r>
+              <a:t>AB-02c vollständig</a:t>
+            </a:r>
+          </a:p>
+        </p:txBody>
+      </p:sp>
+      <p:sp>
+        <p:nvSpPr>
+          <p:cNvPr id="16" name="TextBox 15"/>
+          <p:cNvSpPr txBox="1"/>
+          <p:nvPr/>
+        </p:nvSpPr>
+        <p:spPr>
+          <a:xfrm>
+            <a:off x="457200" y="5760720"/>
+            <a:ext cx="11274552" cy="548640"/>
+          </a:xfrm>
+          <a:prstGeom prst="rect">
+            <a:avLst/>
+          </a:prstGeom>
+          <a:noFill/>
+        </p:spPr>
+        <p:txBody>
+          <a:bodyPr wrap="none">
+            <a:spAutoFit/>
+          </a:bodyPr>
+          <a:lstStyle/>
+          <a:p>
+            <a:pPr algn="ctr">
+              <a:defRPr sz="3200" b="1">
+                <a:solidFill>
+                  <a:srgbClr val="C41E3A"/>
+                </a:solidFill>
+                <a:latin typeface="Arial"/>
+              </a:defRPr>
+            </a:pPr>
+            <a:r>
+              <a:t>¡Hasta luego!</a:t>
+            </a:r>
+          </a:p>
+        </p:txBody>
+      </p:sp>
+    </p:spTree>
+  </p:cSld>
+  <p:clrMapOvr>
+    <a:masterClrMapping/>
+  </p:clrMapOvr>
+</p:sld>
+</file>
+
 <file path=ppt/slides/slide2.xml><?xml version="1.0" encoding="utf-8"?>
 <p:sld xmlns:a="http://schemas.openxmlformats.org/drawingml/2006/main" xmlns:p="http://schemas.openxmlformats.org/presentationml/2006/main" xmlns:r="http://schemas.openxmlformats.org/officeDocument/2006/relationships">
   <p:cSld>
@@ -3558,7 +5740,7 @@
               </a:defRPr>
             </a:pPr>
             <a:r>
-              <a:t>📝 Possessivbegleiter Sg.</a:t>
+              <a:t>Lernziele</a:t>
             </a:r>
           </a:p>
         </p:txBody>
@@ -3572,29 +5754,29 @@
         <p:spPr>
           <a:xfrm>
             <a:off x="640080" y="1463040"/>
-            <a:ext cx="5029200" cy="731520"/>
-          </a:xfrm>
-          <a:prstGeom prst="rect">
-            <a:avLst/>
-          </a:prstGeom>
-          <a:noFill/>
-        </p:spPr>
-        <p:txBody>
-          <a:bodyPr wrap="none">
-            <a:spAutoFit/>
-          </a:bodyPr>
-          <a:lstStyle/>
-          <a:p>
-            <a:pPr algn="l">
-              <a:defRPr sz="2800" b="1">
-                <a:solidFill>
-                  <a:srgbClr val="C41E3A"/>
-                </a:solidFill>
-                <a:latin typeface="Arial"/>
-              </a:defRPr>
-            </a:pPr>
-            <a:r>
-              <a:t>mi padre</a:t>
+            <a:ext cx="10972800" cy="548640"/>
+          </a:xfrm>
+          <a:prstGeom prst="rect">
+            <a:avLst/>
+          </a:prstGeom>
+          <a:noFill/>
+        </p:spPr>
+        <p:txBody>
+          <a:bodyPr wrap="none">
+            <a:spAutoFit/>
+          </a:bodyPr>
+          <a:lstStyle/>
+          <a:p>
+            <a:pPr algn="l">
+              <a:defRPr sz="2000" b="0">
+                <a:solidFill>
+                  <a:srgbClr val="222222"/>
+                </a:solidFill>
+                <a:latin typeface="Arial"/>
+              </a:defRPr>
+            </a:pPr>
+            <a:r>
+              <a:t>Possessivbegleiter (mein, dein, sein)</a:t>
             </a:r>
           </a:p>
         </p:txBody>
@@ -3607,30 +5789,30 @@
         </p:nvSpPr>
         <p:spPr>
           <a:xfrm>
-            <a:off x="5943600" y="1554480"/>
-            <a:ext cx="5486400" cy="548640"/>
-          </a:xfrm>
-          <a:prstGeom prst="rect">
-            <a:avLst/>
-          </a:prstGeom>
-          <a:noFill/>
-        </p:spPr>
-        <p:txBody>
-          <a:bodyPr wrap="none">
-            <a:spAutoFit/>
-          </a:bodyPr>
-          <a:lstStyle/>
-          <a:p>
-            <a:pPr algn="l">
-              <a:defRPr sz="1800" b="0">
-                <a:solidFill>
-                  <a:srgbClr val="555555"/>
-                </a:solidFill>
-                <a:latin typeface="Arial"/>
-              </a:defRPr>
-            </a:pPr>
-            <a:r>
-              <a:t>mein Vater</a:t>
+            <a:off x="640080" y="2194560"/>
+            <a:ext cx="10972800" cy="548640"/>
+          </a:xfrm>
+          <a:prstGeom prst="rect">
+            <a:avLst/>
+          </a:prstGeom>
+          <a:noFill/>
+        </p:spPr>
+        <p:txBody>
+          <a:bodyPr wrap="none">
+            <a:spAutoFit/>
+          </a:bodyPr>
+          <a:lstStyle/>
+          <a:p>
+            <a:pPr algn="l">
+              <a:defRPr sz="2000" b="0">
+                <a:solidFill>
+                  <a:srgbClr val="222222"/>
+                </a:solidFill>
+                <a:latin typeface="Arial"/>
+              </a:defRPr>
+            </a:pPr>
+            <a:r>
+              <a:t>Familie beschreiben</a:t>
             </a:r>
           </a:p>
         </p:txBody>
@@ -3643,138 +5825,30 @@
         </p:nvSpPr>
         <p:spPr>
           <a:xfrm>
-            <a:off x="640080" y="2560320"/>
-            <a:ext cx="5029200" cy="731520"/>
-          </a:xfrm>
-          <a:prstGeom prst="rect">
-            <a:avLst/>
-          </a:prstGeom>
-          <a:noFill/>
-        </p:spPr>
-        <p:txBody>
-          <a:bodyPr wrap="none">
-            <a:spAutoFit/>
-          </a:bodyPr>
-          <a:lstStyle/>
-          <a:p>
-            <a:pPr algn="l">
-              <a:defRPr sz="2800" b="1">
-                <a:solidFill>
-                  <a:srgbClr val="C41E3A"/>
-                </a:solidFill>
-                <a:latin typeface="Arial"/>
-              </a:defRPr>
-            </a:pPr>
-            <a:r>
-              <a:t>tu madre</a:t>
-            </a:r>
-          </a:p>
-        </p:txBody>
-      </p:sp>
-      <p:sp>
-        <p:nvSpPr>
-          <p:cNvPr id="11" name="TextBox 10"/>
-          <p:cNvSpPr txBox="1"/>
-          <p:nvPr/>
-        </p:nvSpPr>
-        <p:spPr>
-          <a:xfrm>
-            <a:off x="5943600" y="2651760"/>
-            <a:ext cx="5486400" cy="548640"/>
-          </a:xfrm>
-          <a:prstGeom prst="rect">
-            <a:avLst/>
-          </a:prstGeom>
-          <a:noFill/>
-        </p:spPr>
-        <p:txBody>
-          <a:bodyPr wrap="none">
-            <a:spAutoFit/>
-          </a:bodyPr>
-          <a:lstStyle/>
-          <a:p>
-            <a:pPr algn="l">
-              <a:defRPr sz="1800" b="0">
-                <a:solidFill>
-                  <a:srgbClr val="555555"/>
-                </a:solidFill>
-                <a:latin typeface="Arial"/>
-              </a:defRPr>
-            </a:pPr>
-            <a:r>
-              <a:t>deine Mutter</a:t>
-            </a:r>
-          </a:p>
-        </p:txBody>
-      </p:sp>
-      <p:sp>
-        <p:nvSpPr>
-          <p:cNvPr id="12" name="TextBox 11"/>
-          <p:cNvSpPr txBox="1"/>
-          <p:nvPr/>
-        </p:nvSpPr>
-        <p:spPr>
-          <a:xfrm>
-            <a:off x="640080" y="3657600"/>
-            <a:ext cx="5029200" cy="731520"/>
-          </a:xfrm>
-          <a:prstGeom prst="rect">
-            <a:avLst/>
-          </a:prstGeom>
-          <a:noFill/>
-        </p:spPr>
-        <p:txBody>
-          <a:bodyPr wrap="none">
-            <a:spAutoFit/>
-          </a:bodyPr>
-          <a:lstStyle/>
-          <a:p>
-            <a:pPr algn="l">
-              <a:defRPr sz="2800" b="1">
-                <a:solidFill>
-                  <a:srgbClr val="C41E3A"/>
-                </a:solidFill>
-                <a:latin typeface="Arial"/>
-              </a:defRPr>
-            </a:pPr>
-            <a:r>
-              <a:t>su hermano</a:t>
-            </a:r>
-          </a:p>
-        </p:txBody>
-      </p:sp>
-      <p:sp>
-        <p:nvSpPr>
-          <p:cNvPr id="13" name="TextBox 12"/>
-          <p:cNvSpPr txBox="1"/>
-          <p:nvPr/>
-        </p:nvSpPr>
-        <p:spPr>
-          <a:xfrm>
-            <a:off x="5943600" y="3749039"/>
-            <a:ext cx="5486400" cy="548640"/>
-          </a:xfrm>
-          <a:prstGeom prst="rect">
-            <a:avLst/>
-          </a:prstGeom>
-          <a:noFill/>
-        </p:spPr>
-        <p:txBody>
-          <a:bodyPr wrap="none">
-            <a:spAutoFit/>
-          </a:bodyPr>
-          <a:lstStyle/>
-          <a:p>
-            <a:pPr algn="l">
-              <a:defRPr sz="1800" b="0">
-                <a:solidFill>
-                  <a:srgbClr val="555555"/>
-                </a:solidFill>
-                <a:latin typeface="Arial"/>
-              </a:defRPr>
-            </a:pPr>
-            <a:r>
-              <a:t>sein Bruder</a:t>
+            <a:off x="640080" y="2926080"/>
+            <a:ext cx="10972800" cy="548640"/>
+          </a:xfrm>
+          <a:prstGeom prst="rect">
+            <a:avLst/>
+          </a:prstGeom>
+          <a:noFill/>
+        </p:spPr>
+        <p:txBody>
+          <a:bodyPr wrap="none">
+            <a:spAutoFit/>
+          </a:bodyPr>
+          <a:lstStyle/>
+          <a:p>
+            <a:pPr algn="l">
+              <a:defRPr sz="2000" b="0">
+                <a:solidFill>
+                  <a:srgbClr val="222222"/>
+                </a:solidFill>
+                <a:latin typeface="Arial"/>
+              </a:defRPr>
+            </a:pPr>
+            <a:r>
+              <a:t>Possessiv + Plural</a:t>
             </a:r>
           </a:p>
         </p:txBody>
@@ -4022,7 +6096,7 @@
               </a:defRPr>
             </a:pPr>
             <a:r>
-              <a:t>📝 Possessivbegleiter Pl.</a:t>
+              <a:t>📝 Possessivbegleiter Singular</a:t>
             </a:r>
           </a:p>
         </p:txBody>
@@ -4058,7 +6132,7 @@
               </a:defRPr>
             </a:pPr>
             <a:r>
-              <a:t>mis padres</a:t>
+              <a:t>mi padre</a:t>
             </a:r>
           </a:p>
         </p:txBody>
@@ -4094,7 +6168,7 @@
               </a:defRPr>
             </a:pPr>
             <a:r>
-              <a:t>meine Eltern</a:t>
+              <a:t>mein Vater</a:t>
             </a:r>
           </a:p>
         </p:txBody>
@@ -4130,7 +6204,7 @@
               </a:defRPr>
             </a:pPr>
             <a:r>
-              <a:t>tus hermanos</a:t>
+              <a:t>tu madre</a:t>
             </a:r>
           </a:p>
         </p:txBody>
@@ -4166,53 +6240,44 @@
               </a:defRPr>
             </a:pPr>
             <a:r>
-              <a:t>deine Geschwister</a:t>
-            </a:r>
-          </a:p>
-        </p:txBody>
-      </p:sp>
-      <p:sp>
-        <p:nvSpPr>
-          <p:cNvPr id="12" name="Rectangle 11"/>
-          <p:cNvSpPr/>
-          <p:nvPr/>
-        </p:nvSpPr>
-        <p:spPr>
-          <a:xfrm>
-            <a:off x="457200" y="5029200"/>
-            <a:ext cx="11274552" cy="1097280"/>
-          </a:xfrm>
-          <a:prstGeom prst="rect">
-            <a:avLst/>
-          </a:prstGeom>
-          <a:solidFill>
-            <a:srgbClr val="FFF8F0"/>
-          </a:solidFill>
-          <a:ln>
-            <a:solidFill>
-              <a:srgbClr val="B35C00"/>
-            </a:solidFill>
-          </a:ln>
-        </p:spPr>
-        <p:style>
-          <a:lnRef idx="1">
-            <a:schemeClr val="accent1"/>
-          </a:lnRef>
-          <a:fillRef idx="3">
-            <a:schemeClr val="accent1"/>
-          </a:fillRef>
-          <a:effectRef idx="2">
-            <a:schemeClr val="accent1"/>
-          </a:effectRef>
-          <a:fontRef idx="minor">
-            <a:schemeClr val="lt1"/>
-          </a:fontRef>
-        </p:style>
-        <p:txBody>
-          <a:bodyPr rtlCol="0" anchor="ctr"/>
-          <a:lstStyle/>
-          <a:p>
-            <a:pPr algn="ctr"/>
+              <a:t>deine Mutter</a:t>
+            </a:r>
+          </a:p>
+        </p:txBody>
+      </p:sp>
+      <p:sp>
+        <p:nvSpPr>
+          <p:cNvPr id="12" name="TextBox 11"/>
+          <p:cNvSpPr txBox="1"/>
+          <p:nvPr/>
+        </p:nvSpPr>
+        <p:spPr>
+          <a:xfrm>
+            <a:off x="640080" y="3657600"/>
+            <a:ext cx="5029200" cy="731520"/>
+          </a:xfrm>
+          <a:prstGeom prst="rect">
+            <a:avLst/>
+          </a:prstGeom>
+          <a:noFill/>
+        </p:spPr>
+        <p:txBody>
+          <a:bodyPr wrap="none">
+            <a:spAutoFit/>
+          </a:bodyPr>
+          <a:lstStyle/>
+          <a:p>
+            <a:pPr algn="l">
+              <a:defRPr sz="2800" b="1">
+                <a:solidFill>
+                  <a:srgbClr val="C41E3A"/>
+                </a:solidFill>
+                <a:latin typeface="Arial"/>
+              </a:defRPr>
+            </a:pPr>
+            <a:r>
+              <a:t>su hermano</a:t>
+            </a:r>
           </a:p>
         </p:txBody>
       </p:sp>
@@ -4224,30 +6289,30 @@
         </p:nvSpPr>
         <p:spPr>
           <a:xfrm>
-            <a:off x="640080" y="5212080"/>
-            <a:ext cx="10972800" cy="731520"/>
-          </a:xfrm>
-          <a:prstGeom prst="rect">
-            <a:avLst/>
-          </a:prstGeom>
-          <a:noFill/>
-        </p:spPr>
-        <p:txBody>
-          <a:bodyPr wrap="none">
-            <a:spAutoFit/>
-          </a:bodyPr>
-          <a:lstStyle/>
-          <a:p>
-            <a:pPr algn="l">
-              <a:defRPr sz="1600" b="0">
-                <a:solidFill>
-                  <a:srgbClr val="222222"/>
-                </a:solidFill>
-                <a:latin typeface="Arial"/>
-              </a:defRPr>
-            </a:pPr>
-            <a:r>
-              <a:t>💡 mi→mis, tu→tus, su→sus vor Plural</a:t>
+            <a:off x="5943600" y="3749039"/>
+            <a:ext cx="5486400" cy="548640"/>
+          </a:xfrm>
+          <a:prstGeom prst="rect">
+            <a:avLst/>
+          </a:prstGeom>
+          <a:noFill/>
+        </p:spPr>
+        <p:txBody>
+          <a:bodyPr wrap="none">
+            <a:spAutoFit/>
+          </a:bodyPr>
+          <a:lstStyle/>
+          <a:p>
+            <a:pPr algn="l">
+              <a:defRPr sz="1800" b="0">
+                <a:solidFill>
+                  <a:srgbClr val="555555"/>
+                </a:solidFill>
+                <a:latin typeface="Arial"/>
+              </a:defRPr>
+            </a:pPr>
+            <a:r>
+              <a:t>sein/ihr Bruder</a:t>
             </a:r>
           </a:p>
         </p:txBody>
@@ -4466,23 +6531,277 @@
       </p:sp>
       <p:sp>
         <p:nvSpPr>
-          <p:cNvPr id="7" name="Rectangle 6"/>
+          <p:cNvPr id="7" name="TextBox 6"/>
+          <p:cNvSpPr txBox="1"/>
+          <p:nvPr/>
+        </p:nvSpPr>
+        <p:spPr>
+          <a:xfrm>
+            <a:off x="457200" y="640080"/>
+            <a:ext cx="11274552" cy="731520"/>
+          </a:xfrm>
+          <a:prstGeom prst="rect">
+            <a:avLst/>
+          </a:prstGeom>
+          <a:noFill/>
+        </p:spPr>
+        <p:txBody>
+          <a:bodyPr wrap="none">
+            <a:spAutoFit/>
+          </a:bodyPr>
+          <a:lstStyle/>
+          <a:p>
+            <a:pPr algn="l">
+              <a:defRPr sz="3200" b="1">
+                <a:solidFill>
+                  <a:srgbClr val="C41E3A"/>
+                </a:solidFill>
+                <a:latin typeface="Arial"/>
+              </a:defRPr>
+            </a:pPr>
+            <a:r>
+              <a:t>📝 Possessivbegleiter Plural</a:t>
+            </a:r>
+          </a:p>
+        </p:txBody>
+      </p:sp>
+      <p:sp>
+        <p:nvSpPr>
+          <p:cNvPr id="8" name="TextBox 7"/>
+          <p:cNvSpPr txBox="1"/>
+          <p:nvPr/>
+        </p:nvSpPr>
+        <p:spPr>
+          <a:xfrm>
+            <a:off x="640080" y="1463040"/>
+            <a:ext cx="5029200" cy="731520"/>
+          </a:xfrm>
+          <a:prstGeom prst="rect">
+            <a:avLst/>
+          </a:prstGeom>
+          <a:noFill/>
+        </p:spPr>
+        <p:txBody>
+          <a:bodyPr wrap="none">
+            <a:spAutoFit/>
+          </a:bodyPr>
+          <a:lstStyle/>
+          <a:p>
+            <a:pPr algn="l">
+              <a:defRPr sz="2800" b="1">
+                <a:solidFill>
+                  <a:srgbClr val="C41E3A"/>
+                </a:solidFill>
+                <a:latin typeface="Arial"/>
+              </a:defRPr>
+            </a:pPr>
+            <a:r>
+              <a:t>mis padres</a:t>
+            </a:r>
+          </a:p>
+        </p:txBody>
+      </p:sp>
+      <p:sp>
+        <p:nvSpPr>
+          <p:cNvPr id="9" name="TextBox 8"/>
+          <p:cNvSpPr txBox="1"/>
+          <p:nvPr/>
+        </p:nvSpPr>
+        <p:spPr>
+          <a:xfrm>
+            <a:off x="5943600" y="1554480"/>
+            <a:ext cx="5486400" cy="548640"/>
+          </a:xfrm>
+          <a:prstGeom prst="rect">
+            <a:avLst/>
+          </a:prstGeom>
+          <a:noFill/>
+        </p:spPr>
+        <p:txBody>
+          <a:bodyPr wrap="none">
+            <a:spAutoFit/>
+          </a:bodyPr>
+          <a:lstStyle/>
+          <a:p>
+            <a:pPr algn="l">
+              <a:defRPr sz="1800" b="0">
+                <a:solidFill>
+                  <a:srgbClr val="555555"/>
+                </a:solidFill>
+                <a:latin typeface="Arial"/>
+              </a:defRPr>
+            </a:pPr>
+            <a:r>
+              <a:t>meine Eltern</a:t>
+            </a:r>
+          </a:p>
+        </p:txBody>
+      </p:sp>
+      <p:sp>
+        <p:nvSpPr>
+          <p:cNvPr id="10" name="TextBox 9"/>
+          <p:cNvSpPr txBox="1"/>
+          <p:nvPr/>
+        </p:nvSpPr>
+        <p:spPr>
+          <a:xfrm>
+            <a:off x="640080" y="2560320"/>
+            <a:ext cx="5029200" cy="731520"/>
+          </a:xfrm>
+          <a:prstGeom prst="rect">
+            <a:avLst/>
+          </a:prstGeom>
+          <a:noFill/>
+        </p:spPr>
+        <p:txBody>
+          <a:bodyPr wrap="none">
+            <a:spAutoFit/>
+          </a:bodyPr>
+          <a:lstStyle/>
+          <a:p>
+            <a:pPr algn="l">
+              <a:defRPr sz="2800" b="1">
+                <a:solidFill>
+                  <a:srgbClr val="C41E3A"/>
+                </a:solidFill>
+                <a:latin typeface="Arial"/>
+              </a:defRPr>
+            </a:pPr>
+            <a:r>
+              <a:t>tus hermanos</a:t>
+            </a:r>
+          </a:p>
+        </p:txBody>
+      </p:sp>
+      <p:sp>
+        <p:nvSpPr>
+          <p:cNvPr id="11" name="TextBox 10"/>
+          <p:cNvSpPr txBox="1"/>
+          <p:nvPr/>
+        </p:nvSpPr>
+        <p:spPr>
+          <a:xfrm>
+            <a:off x="5943600" y="2651760"/>
+            <a:ext cx="5486400" cy="548640"/>
+          </a:xfrm>
+          <a:prstGeom prst="rect">
+            <a:avLst/>
+          </a:prstGeom>
+          <a:noFill/>
+        </p:spPr>
+        <p:txBody>
+          <a:bodyPr wrap="none">
+            <a:spAutoFit/>
+          </a:bodyPr>
+          <a:lstStyle/>
+          <a:p>
+            <a:pPr algn="l">
+              <a:defRPr sz="1800" b="0">
+                <a:solidFill>
+                  <a:srgbClr val="555555"/>
+                </a:solidFill>
+                <a:latin typeface="Arial"/>
+              </a:defRPr>
+            </a:pPr>
+            <a:r>
+              <a:t>deine Geschwister</a:t>
+            </a:r>
+          </a:p>
+        </p:txBody>
+      </p:sp>
+      <p:sp>
+        <p:nvSpPr>
+          <p:cNvPr id="12" name="TextBox 11"/>
+          <p:cNvSpPr txBox="1"/>
+          <p:nvPr/>
+        </p:nvSpPr>
+        <p:spPr>
+          <a:xfrm>
+            <a:off x="640080" y="3657600"/>
+            <a:ext cx="5029200" cy="731520"/>
+          </a:xfrm>
+          <a:prstGeom prst="rect">
+            <a:avLst/>
+          </a:prstGeom>
+          <a:noFill/>
+        </p:spPr>
+        <p:txBody>
+          <a:bodyPr wrap="none">
+            <a:spAutoFit/>
+          </a:bodyPr>
+          <a:lstStyle/>
+          <a:p>
+            <a:pPr algn="l">
+              <a:defRPr sz="2800" b="1">
+                <a:solidFill>
+                  <a:srgbClr val="C41E3A"/>
+                </a:solidFill>
+                <a:latin typeface="Arial"/>
+              </a:defRPr>
+            </a:pPr>
+            <a:r>
+              <a:t>sus abuelos</a:t>
+            </a:r>
+          </a:p>
+        </p:txBody>
+      </p:sp>
+      <p:sp>
+        <p:nvSpPr>
+          <p:cNvPr id="13" name="TextBox 12"/>
+          <p:cNvSpPr txBox="1"/>
+          <p:nvPr/>
+        </p:nvSpPr>
+        <p:spPr>
+          <a:xfrm>
+            <a:off x="5943600" y="3749039"/>
+            <a:ext cx="5486400" cy="548640"/>
+          </a:xfrm>
+          <a:prstGeom prst="rect">
+            <a:avLst/>
+          </a:prstGeom>
+          <a:noFill/>
+        </p:spPr>
+        <p:txBody>
+          <a:bodyPr wrap="none">
+            <a:spAutoFit/>
+          </a:bodyPr>
+          <a:lstStyle/>
+          <a:p>
+            <a:pPr algn="l">
+              <a:defRPr sz="1800" b="0">
+                <a:solidFill>
+                  <a:srgbClr val="555555"/>
+                </a:solidFill>
+                <a:latin typeface="Arial"/>
+              </a:defRPr>
+            </a:pPr>
+            <a:r>
+              <a:t>seine/ihre Großeltern</a:t>
+            </a:r>
+          </a:p>
+        </p:txBody>
+      </p:sp>
+      <p:sp>
+        <p:nvSpPr>
+          <p:cNvPr id="14" name="Rectangle 13"/>
           <p:cNvSpPr/>
           <p:nvPr/>
         </p:nvSpPr>
         <p:spPr>
           <a:xfrm>
-            <a:off x="457200" y="640080"/>
-            <a:ext cx="1828800" cy="457200"/>
+            <a:off x="457200" y="5029200"/>
+            <a:ext cx="11274552" cy="1097280"/>
           </a:xfrm>
           <a:prstGeom prst="rect">
             <a:avLst/>
           </a:prstGeom>
           <a:solidFill>
-            <a:srgbClr val="C41E3A"/>
+            <a:srgbClr val="FFF8F0"/>
           </a:solidFill>
           <a:ln>
-            <a:noFill/>
+            <a:solidFill>
+              <a:srgbClr val="B35C00"/>
+            </a:solidFill>
           </a:ln>
         </p:spPr>
         <p:style>
@@ -4509,297 +6828,36 @@
       </p:sp>
       <p:sp>
         <p:nvSpPr>
-          <p:cNvPr id="8" name="TextBox 7"/>
-          <p:cNvSpPr txBox="1"/>
-          <p:nvPr/>
-        </p:nvSpPr>
-        <p:spPr>
-          <a:xfrm>
-            <a:off x="548640" y="713231"/>
-            <a:ext cx="1645920" cy="320040"/>
-          </a:xfrm>
-          <a:prstGeom prst="rect">
-            <a:avLst/>
-          </a:prstGeom>
-          <a:noFill/>
-        </p:spPr>
-        <p:txBody>
-          <a:bodyPr wrap="none">
-            <a:spAutoFit/>
-          </a:bodyPr>
-          <a:lstStyle/>
-          <a:p>
-            <a:pPr algn="ctr">
-              <a:defRPr sz="1400" b="1">
-                <a:solidFill>
-                  <a:srgbClr val="FFFFFF"/>
-                </a:solidFill>
-                <a:latin typeface="Arial"/>
-              </a:defRPr>
-            </a:pPr>
-            <a:r>
-              <a:t>ÜBUNG</a:t>
-            </a:r>
-          </a:p>
-        </p:txBody>
-      </p:sp>
-      <p:sp>
-        <p:nvSpPr>
-          <p:cNvPr id="9" name="TextBox 8"/>
-          <p:cNvSpPr txBox="1"/>
-          <p:nvPr/>
-        </p:nvSpPr>
-        <p:spPr>
-          <a:xfrm>
-            <a:off x="457200" y="1280160"/>
-            <a:ext cx="11274552" cy="731520"/>
-          </a:xfrm>
-          <a:prstGeom prst="rect">
-            <a:avLst/>
-          </a:prstGeom>
-          <a:noFill/>
-        </p:spPr>
-        <p:txBody>
-          <a:bodyPr wrap="none">
-            <a:spAutoFit/>
-          </a:bodyPr>
-          <a:lstStyle/>
-          <a:p>
-            <a:pPr algn="l">
-              <a:defRPr sz="3200" b="1">
-                <a:solidFill>
-                  <a:srgbClr val="C41E3A"/>
-                </a:solidFill>
-                <a:latin typeface="Arial"/>
-              </a:defRPr>
-            </a:pPr>
-            <a:r>
-              <a:t>✏️ Ergänze</a:t>
-            </a:r>
-          </a:p>
-        </p:txBody>
-      </p:sp>
-      <p:sp>
-        <p:nvSpPr>
-          <p:cNvPr id="10" name="TextBox 9"/>
-          <p:cNvSpPr txBox="1"/>
-          <p:nvPr/>
-        </p:nvSpPr>
-        <p:spPr>
-          <a:xfrm>
-            <a:off x="640080" y="2011680"/>
-            <a:ext cx="5029200" cy="548640"/>
-          </a:xfrm>
-          <a:prstGeom prst="rect">
-            <a:avLst/>
-          </a:prstGeom>
-          <a:noFill/>
-        </p:spPr>
-        <p:txBody>
-          <a:bodyPr wrap="none">
-            <a:spAutoFit/>
-          </a:bodyPr>
-          <a:lstStyle/>
-          <a:p>
-            <a:pPr algn="l">
-              <a:defRPr sz="2200" b="1">
-                <a:solidFill>
-                  <a:srgbClr val="C41E3A"/>
-                </a:solidFill>
-                <a:latin typeface="Arial"/>
-              </a:defRPr>
-            </a:pPr>
-            <a:r>
-              <a:t>___ hermana (ich)</a:t>
-            </a:r>
-          </a:p>
-        </p:txBody>
-      </p:sp>
-      <p:sp>
-        <p:nvSpPr>
-          <p:cNvPr id="11" name="TextBox 10"/>
-          <p:cNvSpPr txBox="1"/>
-          <p:nvPr/>
-        </p:nvSpPr>
-        <p:spPr>
-          <a:xfrm>
-            <a:off x="5943600" y="2011680"/>
-            <a:ext cx="5029200" cy="548640"/>
-          </a:xfrm>
-          <a:prstGeom prst="rect">
-            <a:avLst/>
-          </a:prstGeom>
-          <a:noFill/>
-        </p:spPr>
-        <p:txBody>
-          <a:bodyPr wrap="none">
-            <a:spAutoFit/>
-          </a:bodyPr>
-          <a:lstStyle/>
-          <a:p>
-            <a:pPr algn="l">
-              <a:defRPr sz="2200" b="0">
-                <a:solidFill>
-                  <a:srgbClr val="888888"/>
-                </a:solidFill>
-                <a:latin typeface="Arial"/>
-              </a:defRPr>
-            </a:pPr>
-            <a:r>
-              <a:t>mi</a:t>
-            </a:r>
-          </a:p>
-        </p:txBody>
-      </p:sp>
-      <p:sp>
-        <p:nvSpPr>
-          <p:cNvPr id="12" name="TextBox 11"/>
-          <p:cNvSpPr txBox="1"/>
-          <p:nvPr/>
-        </p:nvSpPr>
-        <p:spPr>
-          <a:xfrm>
-            <a:off x="640080" y="2926080"/>
-            <a:ext cx="5029200" cy="548640"/>
-          </a:xfrm>
-          <a:prstGeom prst="rect">
-            <a:avLst/>
-          </a:prstGeom>
-          <a:noFill/>
-        </p:spPr>
-        <p:txBody>
-          <a:bodyPr wrap="none">
-            <a:spAutoFit/>
-          </a:bodyPr>
-          <a:lstStyle/>
-          <a:p>
-            <a:pPr algn="l">
-              <a:defRPr sz="2200" b="1">
-                <a:solidFill>
-                  <a:srgbClr val="C41E3A"/>
-                </a:solidFill>
-                <a:latin typeface="Arial"/>
-              </a:defRPr>
-            </a:pPr>
-            <a:r>
-              <a:t>___ padres (du)</a:t>
-            </a:r>
-          </a:p>
-        </p:txBody>
-      </p:sp>
-      <p:sp>
-        <p:nvSpPr>
-          <p:cNvPr id="13" name="TextBox 12"/>
-          <p:cNvSpPr txBox="1"/>
-          <p:nvPr/>
-        </p:nvSpPr>
-        <p:spPr>
-          <a:xfrm>
-            <a:off x="5943600" y="2926080"/>
-            <a:ext cx="5029200" cy="548640"/>
-          </a:xfrm>
-          <a:prstGeom prst="rect">
-            <a:avLst/>
-          </a:prstGeom>
-          <a:noFill/>
-        </p:spPr>
-        <p:txBody>
-          <a:bodyPr wrap="none">
-            <a:spAutoFit/>
-          </a:bodyPr>
-          <a:lstStyle/>
-          <a:p>
-            <a:pPr algn="l">
-              <a:defRPr sz="2200" b="0">
-                <a:solidFill>
-                  <a:srgbClr val="888888"/>
-                </a:solidFill>
-                <a:latin typeface="Arial"/>
-              </a:defRPr>
-            </a:pPr>
-            <a:r>
-              <a:t>tus</a:t>
-            </a:r>
-          </a:p>
-        </p:txBody>
-      </p:sp>
-      <p:sp>
-        <p:nvSpPr>
-          <p:cNvPr id="14" name="Rectangle 13"/>
-          <p:cNvSpPr/>
-          <p:nvPr/>
-        </p:nvSpPr>
-        <p:spPr>
-          <a:xfrm>
-            <a:off x="457200" y="5943600"/>
-            <a:ext cx="11274552" cy="548640"/>
-          </a:xfrm>
-          <a:prstGeom prst="rect">
-            <a:avLst/>
-          </a:prstGeom>
-          <a:solidFill>
-            <a:srgbClr val="FDF2F4"/>
-          </a:solidFill>
-          <a:ln>
-            <a:solidFill>
-              <a:srgbClr val="C41E3A"/>
-            </a:solidFill>
-          </a:ln>
-        </p:spPr>
-        <p:style>
-          <a:lnRef idx="1">
-            <a:schemeClr val="accent1"/>
-          </a:lnRef>
-          <a:fillRef idx="3">
-            <a:schemeClr val="accent1"/>
-          </a:fillRef>
-          <a:effectRef idx="2">
-            <a:schemeClr val="accent1"/>
-          </a:effectRef>
-          <a:fontRef idx="minor">
-            <a:schemeClr val="lt1"/>
-          </a:fontRef>
-        </p:style>
-        <p:txBody>
-          <a:bodyPr rtlCol="0" anchor="ctr"/>
-          <a:lstStyle/>
-          <a:p>
-            <a:pPr algn="ctr"/>
-          </a:p>
-        </p:txBody>
-      </p:sp>
-      <p:sp>
-        <p:nvSpPr>
           <p:cNvPr id="15" name="TextBox 14"/>
           <p:cNvSpPr txBox="1"/>
           <p:nvPr/>
         </p:nvSpPr>
         <p:spPr>
           <a:xfrm>
-            <a:off x="640080" y="6053328"/>
-            <a:ext cx="10972800" cy="365760"/>
-          </a:xfrm>
-          <a:prstGeom prst="rect">
-            <a:avLst/>
-          </a:prstGeom>
-          <a:noFill/>
-        </p:spPr>
-        <p:txBody>
-          <a:bodyPr wrap="none">
-            <a:spAutoFit/>
-          </a:bodyPr>
-          <a:lstStyle/>
-          <a:p>
-            <a:pPr algn="l">
-              <a:defRPr sz="1400" b="1">
-                <a:solidFill>
-                  <a:srgbClr val="C41E3A"/>
-                </a:solidFill>
-                <a:latin typeface="Arial"/>
-              </a:defRPr>
-            </a:pPr>
-            <a:r>
-              <a:t>📝 AB-02c: Aufgabe 2</a:t>
+            <a:off x="640080" y="5212080"/>
+            <a:ext cx="10972800" cy="731520"/>
+          </a:xfrm>
+          <a:prstGeom prst="rect">
+            <a:avLst/>
+          </a:prstGeom>
+          <a:noFill/>
+        </p:spPr>
+        <p:txBody>
+          <a:bodyPr wrap="none">
+            <a:spAutoFit/>
+          </a:bodyPr>
+          <a:lstStyle/>
+          <a:p>
+            <a:pPr algn="l">
+              <a:defRPr sz="1600" b="0">
+                <a:solidFill>
+                  <a:srgbClr val="222222"/>
+                </a:solidFill>
+                <a:latin typeface="Arial"/>
+              </a:defRPr>
+            </a:pPr>
+            <a:r>
+              <a:t>💡 Vor Plural: mi→mis, tu→tus, su→sus</a:t>
             </a:r>
           </a:p>
         </p:txBody>
@@ -5018,14 +7076,284 @@
       </p:sp>
       <p:sp>
         <p:nvSpPr>
-          <p:cNvPr id="7" name="Rectangle 6"/>
+          <p:cNvPr id="7" name="TextBox 6"/>
+          <p:cNvSpPr txBox="1"/>
+          <p:nvPr/>
+        </p:nvSpPr>
+        <p:spPr>
+          <a:xfrm>
+            <a:off x="457200" y="640080"/>
+            <a:ext cx="11274552" cy="731520"/>
+          </a:xfrm>
+          <a:prstGeom prst="rect">
+            <a:avLst/>
+          </a:prstGeom>
+          <a:noFill/>
+        </p:spPr>
+        <p:txBody>
+          <a:bodyPr wrap="none">
+            <a:spAutoFit/>
+          </a:bodyPr>
+          <a:lstStyle/>
+          <a:p>
+            <a:pPr algn="l">
+              <a:defRPr sz="3200" b="1">
+                <a:solidFill>
+                  <a:srgbClr val="C41E3A"/>
+                </a:solidFill>
+                <a:latin typeface="Arial"/>
+              </a:defRPr>
+            </a:pPr>
+            <a:r>
+              <a:t>📝 Übersicht Possessiv</a:t>
+            </a:r>
+          </a:p>
+        </p:txBody>
+      </p:sp>
+      <p:sp>
+        <p:nvSpPr>
+          <p:cNvPr id="8" name="TextBox 7"/>
+          <p:cNvSpPr txBox="1"/>
+          <p:nvPr/>
+        </p:nvSpPr>
+        <p:spPr>
+          <a:xfrm>
+            <a:off x="640080" y="1463040"/>
+            <a:ext cx="5029200" cy="731520"/>
+          </a:xfrm>
+          <a:prstGeom prst="rect">
+            <a:avLst/>
+          </a:prstGeom>
+          <a:noFill/>
+        </p:spPr>
+        <p:txBody>
+          <a:bodyPr wrap="none">
+            <a:spAutoFit/>
+          </a:bodyPr>
+          <a:lstStyle/>
+          <a:p>
+            <a:pPr algn="l">
+              <a:defRPr sz="2800" b="1">
+                <a:solidFill>
+                  <a:srgbClr val="C41E3A"/>
+                </a:solidFill>
+                <a:latin typeface="Arial"/>
+              </a:defRPr>
+            </a:pPr>
+            <a:r>
+              <a:t>mi / mis</a:t>
+            </a:r>
+          </a:p>
+        </p:txBody>
+      </p:sp>
+      <p:sp>
+        <p:nvSpPr>
+          <p:cNvPr id="9" name="TextBox 8"/>
+          <p:cNvSpPr txBox="1"/>
+          <p:nvPr/>
+        </p:nvSpPr>
+        <p:spPr>
+          <a:xfrm>
+            <a:off x="5943600" y="1554480"/>
+            <a:ext cx="5486400" cy="548640"/>
+          </a:xfrm>
+          <a:prstGeom prst="rect">
+            <a:avLst/>
+          </a:prstGeom>
+          <a:noFill/>
+        </p:spPr>
+        <p:txBody>
+          <a:bodyPr wrap="none">
+            <a:spAutoFit/>
+          </a:bodyPr>
+          <a:lstStyle/>
+          <a:p>
+            <a:pPr algn="l">
+              <a:defRPr sz="1800" b="0">
+                <a:solidFill>
+                  <a:srgbClr val="555555"/>
+                </a:solidFill>
+                <a:latin typeface="Arial"/>
+              </a:defRPr>
+            </a:pPr>
+            <a:r>
+              <a:t>mein/e</a:t>
+            </a:r>
+          </a:p>
+        </p:txBody>
+      </p:sp>
+      <p:sp>
+        <p:nvSpPr>
+          <p:cNvPr id="10" name="TextBox 9"/>
+          <p:cNvSpPr txBox="1"/>
+          <p:nvPr/>
+        </p:nvSpPr>
+        <p:spPr>
+          <a:xfrm>
+            <a:off x="640080" y="2560320"/>
+            <a:ext cx="5029200" cy="731520"/>
+          </a:xfrm>
+          <a:prstGeom prst="rect">
+            <a:avLst/>
+          </a:prstGeom>
+          <a:noFill/>
+        </p:spPr>
+        <p:txBody>
+          <a:bodyPr wrap="none">
+            <a:spAutoFit/>
+          </a:bodyPr>
+          <a:lstStyle/>
+          <a:p>
+            <a:pPr algn="l">
+              <a:defRPr sz="2800" b="1">
+                <a:solidFill>
+                  <a:srgbClr val="C41E3A"/>
+                </a:solidFill>
+                <a:latin typeface="Arial"/>
+              </a:defRPr>
+            </a:pPr>
+            <a:r>
+              <a:t>tu / tus</a:t>
+            </a:r>
+          </a:p>
+        </p:txBody>
+      </p:sp>
+      <p:sp>
+        <p:nvSpPr>
+          <p:cNvPr id="11" name="TextBox 10"/>
+          <p:cNvSpPr txBox="1"/>
+          <p:nvPr/>
+        </p:nvSpPr>
+        <p:spPr>
+          <a:xfrm>
+            <a:off x="5943600" y="2651760"/>
+            <a:ext cx="5486400" cy="548640"/>
+          </a:xfrm>
+          <a:prstGeom prst="rect">
+            <a:avLst/>
+          </a:prstGeom>
+          <a:noFill/>
+        </p:spPr>
+        <p:txBody>
+          <a:bodyPr wrap="none">
+            <a:spAutoFit/>
+          </a:bodyPr>
+          <a:lstStyle/>
+          <a:p>
+            <a:pPr algn="l">
+              <a:defRPr sz="1800" b="0">
+                <a:solidFill>
+                  <a:srgbClr val="555555"/>
+                </a:solidFill>
+                <a:latin typeface="Arial"/>
+              </a:defRPr>
+            </a:pPr>
+            <a:r>
+              <a:t>dein/e</a:t>
+            </a:r>
+          </a:p>
+        </p:txBody>
+      </p:sp>
+      <p:sp>
+        <p:nvSpPr>
+          <p:cNvPr id="12" name="TextBox 11"/>
+          <p:cNvSpPr txBox="1"/>
+          <p:nvPr/>
+        </p:nvSpPr>
+        <p:spPr>
+          <a:xfrm>
+            <a:off x="640080" y="3657600"/>
+            <a:ext cx="5029200" cy="731520"/>
+          </a:xfrm>
+          <a:prstGeom prst="rect">
+            <a:avLst/>
+          </a:prstGeom>
+          <a:noFill/>
+        </p:spPr>
+        <p:txBody>
+          <a:bodyPr wrap="none">
+            <a:spAutoFit/>
+          </a:bodyPr>
+          <a:lstStyle/>
+          <a:p>
+            <a:pPr algn="l">
+              <a:defRPr sz="2800" b="1">
+                <a:solidFill>
+                  <a:srgbClr val="C41E3A"/>
+                </a:solidFill>
+                <a:latin typeface="Arial"/>
+              </a:defRPr>
+            </a:pPr>
+            <a:r>
+              <a:t>su / sus</a:t>
+            </a:r>
+          </a:p>
+        </p:txBody>
+      </p:sp>
+      <p:sp>
+        <p:nvSpPr>
+          <p:cNvPr id="13" name="TextBox 12"/>
+          <p:cNvSpPr txBox="1"/>
+          <p:nvPr/>
+        </p:nvSpPr>
+        <p:spPr>
+          <a:xfrm>
+            <a:off x="5943600" y="3749039"/>
+            <a:ext cx="5486400" cy="548640"/>
+          </a:xfrm>
+          <a:prstGeom prst="rect">
+            <a:avLst/>
+          </a:prstGeom>
+          <a:noFill/>
+        </p:spPr>
+        <p:txBody>
+          <a:bodyPr wrap="none">
+            <a:spAutoFit/>
+          </a:bodyPr>
+          <a:lstStyle/>
+          <a:p>
+            <a:pPr algn="l">
+              <a:defRPr sz="1800" b="0">
+                <a:solidFill>
+                  <a:srgbClr val="555555"/>
+                </a:solidFill>
+                <a:latin typeface="Arial"/>
+              </a:defRPr>
+            </a:pPr>
+            <a:r>
+              <a:t>sein/e, ihr/e</a:t>
+            </a:r>
+          </a:p>
+        </p:txBody>
+      </p:sp>
+    </p:spTree>
+  </p:cSld>
+  <p:clrMapOvr>
+    <a:masterClrMapping/>
+  </p:clrMapOvr>
+</p:sld>
+</file>
+
+<file path=ppt/slides/slide6.xml><?xml version="1.0" encoding="utf-8"?>
+<p:sld xmlns:a="http://schemas.openxmlformats.org/drawingml/2006/main" xmlns:p="http://schemas.openxmlformats.org/presentationml/2006/main" xmlns:r="http://schemas.openxmlformats.org/officeDocument/2006/relationships">
+  <p:cSld>
+    <p:spTree>
+      <p:nvGrpSpPr>
+        <p:cNvPr id="1" name=""/>
+        <p:cNvGrpSpPr/>
+        <p:nvPr/>
+      </p:nvGrpSpPr>
+      <p:grpSpPr/>
+      <p:sp>
+        <p:nvSpPr>
+          <p:cNvPr id="2" name="Rectangle 1"/>
           <p:cNvSpPr/>
           <p:nvPr/>
         </p:nvSpPr>
         <p:spPr>
           <a:xfrm>
-            <a:off x="457200" y="640080"/>
-            <a:ext cx="1828800" cy="457200"/>
+            <a:off x="0" y="0"/>
+            <a:ext cx="12191695" cy="457200"/>
           </a:xfrm>
           <a:prstGeom prst="rect">
             <a:avLst/>
@@ -5061,6 +7389,1687 @@
       </p:sp>
       <p:sp>
         <p:nvSpPr>
+          <p:cNvPr id="3" name="TextBox 2"/>
+          <p:cNvSpPr txBox="1"/>
+          <p:nvPr/>
+        </p:nvSpPr>
+        <p:spPr>
+          <a:xfrm>
+            <a:off x="274320" y="91440"/>
+            <a:ext cx="3657600" cy="274320"/>
+          </a:xfrm>
+          <a:prstGeom prst="rect">
+            <a:avLst/>
+          </a:prstGeom>
+          <a:noFill/>
+        </p:spPr>
+        <p:txBody>
+          <a:bodyPr wrap="none">
+            <a:spAutoFit/>
+          </a:bodyPr>
+          <a:lstStyle/>
+          <a:p>
+            <a:pPr algn="l">
+              <a:defRPr sz="1400" b="1">
+                <a:solidFill>
+                  <a:srgbClr val="FFFFFF"/>
+                </a:solidFill>
+                <a:latin typeface="Arial"/>
+              </a:defRPr>
+            </a:pPr>
+            <a:r>
+              <a:t>Spanisch Klasse 7 · LP-02c</a:t>
+            </a:r>
+          </a:p>
+        </p:txBody>
+      </p:sp>
+      <p:sp>
+        <p:nvSpPr>
+          <p:cNvPr id="4" name="Rectangle 3"/>
+          <p:cNvSpPr/>
+          <p:nvPr/>
+        </p:nvSpPr>
+        <p:spPr>
+          <a:xfrm>
+            <a:off x="0" y="6583680"/>
+            <a:ext cx="12191695" cy="274320"/>
+          </a:xfrm>
+          <a:prstGeom prst="rect">
+            <a:avLst/>
+          </a:prstGeom>
+          <a:solidFill>
+            <a:srgbClr val="F5F5F5"/>
+          </a:solidFill>
+          <a:ln>
+            <a:noFill/>
+          </a:ln>
+        </p:spPr>
+        <p:style>
+          <a:lnRef idx="1">
+            <a:schemeClr val="accent1"/>
+          </a:lnRef>
+          <a:fillRef idx="3">
+            <a:schemeClr val="accent1"/>
+          </a:fillRef>
+          <a:effectRef idx="2">
+            <a:schemeClr val="accent1"/>
+          </a:effectRef>
+          <a:fontRef idx="minor">
+            <a:schemeClr val="lt1"/>
+          </a:fontRef>
+        </p:style>
+        <p:txBody>
+          <a:bodyPr rtlCol="0" anchor="ctr"/>
+          <a:lstStyle/>
+          <a:p>
+            <a:pPr algn="ctr"/>
+          </a:p>
+        </p:txBody>
+      </p:sp>
+      <p:sp>
+        <p:nvSpPr>
+          <p:cNvPr id="5" name="TextBox 4"/>
+          <p:cNvSpPr txBox="1"/>
+          <p:nvPr/>
+        </p:nvSpPr>
+        <p:spPr>
+          <a:xfrm>
+            <a:off x="274320" y="6601968"/>
+            <a:ext cx="4572000" cy="228600"/>
+          </a:xfrm>
+          <a:prstGeom prst="rect">
+            <a:avLst/>
+          </a:prstGeom>
+          <a:noFill/>
+        </p:spPr>
+        <p:txBody>
+          <a:bodyPr wrap="none">
+            <a:spAutoFit/>
+          </a:bodyPr>
+          <a:lstStyle/>
+          <a:p>
+            <a:pPr algn="l">
+              <a:defRPr sz="1000" b="0">
+                <a:solidFill>
+                  <a:srgbClr val="555555"/>
+                </a:solidFill>
+                <a:latin typeface="Arial"/>
+              </a:defRPr>
+            </a:pPr>
+            <a:r>
+              <a:t>Mi familia</a:t>
+            </a:r>
+          </a:p>
+        </p:txBody>
+      </p:sp>
+      <p:sp>
+        <p:nvSpPr>
+          <p:cNvPr id="6" name="TextBox 5"/>
+          <p:cNvSpPr txBox="1"/>
+          <p:nvPr/>
+        </p:nvSpPr>
+        <p:spPr>
+          <a:xfrm>
+            <a:off x="9144000" y="6601968"/>
+            <a:ext cx="2743200" cy="228600"/>
+          </a:xfrm>
+          <a:prstGeom prst="rect">
+            <a:avLst/>
+          </a:prstGeom>
+          <a:noFill/>
+        </p:spPr>
+        <p:txBody>
+          <a:bodyPr wrap="none">
+            <a:spAutoFit/>
+          </a:bodyPr>
+          <a:lstStyle/>
+          <a:p>
+            <a:pPr algn="r">
+              <a:defRPr sz="1000" b="0">
+                <a:solidFill>
+                  <a:srgbClr val="555555"/>
+                </a:solidFill>
+                <a:latin typeface="Arial"/>
+              </a:defRPr>
+            </a:pPr>
+            <a:r>
+              <a:t>Sequenz 2</a:t>
+            </a:r>
+          </a:p>
+        </p:txBody>
+      </p:sp>
+      <p:sp>
+        <p:nvSpPr>
+          <p:cNvPr id="7" name="TextBox 6"/>
+          <p:cNvSpPr txBox="1"/>
+          <p:nvPr/>
+        </p:nvSpPr>
+        <p:spPr>
+          <a:xfrm>
+            <a:off x="457200" y="640080"/>
+            <a:ext cx="11274552" cy="731520"/>
+          </a:xfrm>
+          <a:prstGeom prst="rect">
+            <a:avLst/>
+          </a:prstGeom>
+          <a:noFill/>
+        </p:spPr>
+        <p:txBody>
+          <a:bodyPr wrap="none">
+            <a:spAutoFit/>
+          </a:bodyPr>
+          <a:lstStyle/>
+          <a:p>
+            <a:pPr algn="l">
+              <a:defRPr sz="3200" b="1">
+                <a:solidFill>
+                  <a:srgbClr val="C41E3A"/>
+                </a:solidFill>
+                <a:latin typeface="Arial"/>
+              </a:defRPr>
+            </a:pPr>
+            <a:r>
+              <a:t>Beispiele</a:t>
+            </a:r>
+          </a:p>
+        </p:txBody>
+      </p:sp>
+      <p:sp>
+        <p:nvSpPr>
+          <p:cNvPr id="8" name="TextBox 7"/>
+          <p:cNvSpPr txBox="1"/>
+          <p:nvPr/>
+        </p:nvSpPr>
+        <p:spPr>
+          <a:xfrm>
+            <a:off x="640080" y="1463040"/>
+            <a:ext cx="10972800" cy="548640"/>
+          </a:xfrm>
+          <a:prstGeom prst="rect">
+            <a:avLst/>
+          </a:prstGeom>
+          <a:noFill/>
+        </p:spPr>
+        <p:txBody>
+          <a:bodyPr wrap="none">
+            <a:spAutoFit/>
+          </a:bodyPr>
+          <a:lstStyle/>
+          <a:p>
+            <a:pPr algn="l">
+              <a:defRPr sz="2000" b="0">
+                <a:solidFill>
+                  <a:srgbClr val="222222"/>
+                </a:solidFill>
+                <a:latin typeface="Arial"/>
+              </a:defRPr>
+            </a:pPr>
+            <a:r>
+              <a:t>Mi hermana se llama Ana.</a:t>
+            </a:r>
+          </a:p>
+        </p:txBody>
+      </p:sp>
+      <p:sp>
+        <p:nvSpPr>
+          <p:cNvPr id="9" name="TextBox 8"/>
+          <p:cNvSpPr txBox="1"/>
+          <p:nvPr/>
+        </p:nvSpPr>
+        <p:spPr>
+          <a:xfrm>
+            <a:off x="640080" y="2194560"/>
+            <a:ext cx="10972800" cy="548640"/>
+          </a:xfrm>
+          <a:prstGeom prst="rect">
+            <a:avLst/>
+          </a:prstGeom>
+          <a:noFill/>
+        </p:spPr>
+        <p:txBody>
+          <a:bodyPr wrap="none">
+            <a:spAutoFit/>
+          </a:bodyPr>
+          <a:lstStyle/>
+          <a:p>
+            <a:pPr algn="l">
+              <a:defRPr sz="2000" b="0">
+                <a:solidFill>
+                  <a:srgbClr val="222222"/>
+                </a:solidFill>
+                <a:latin typeface="Arial"/>
+              </a:defRPr>
+            </a:pPr>
+            <a:r>
+              <a:t>Mis padres son de España.</a:t>
+            </a:r>
+          </a:p>
+        </p:txBody>
+      </p:sp>
+      <p:sp>
+        <p:nvSpPr>
+          <p:cNvPr id="10" name="TextBox 9"/>
+          <p:cNvSpPr txBox="1"/>
+          <p:nvPr/>
+        </p:nvSpPr>
+        <p:spPr>
+          <a:xfrm>
+            <a:off x="640080" y="2926080"/>
+            <a:ext cx="10972800" cy="548640"/>
+          </a:xfrm>
+          <a:prstGeom prst="rect">
+            <a:avLst/>
+          </a:prstGeom>
+          <a:noFill/>
+        </p:spPr>
+        <p:txBody>
+          <a:bodyPr wrap="none">
+            <a:spAutoFit/>
+          </a:bodyPr>
+          <a:lstStyle/>
+          <a:p>
+            <a:pPr algn="l">
+              <a:defRPr sz="2000" b="0">
+                <a:solidFill>
+                  <a:srgbClr val="222222"/>
+                </a:solidFill>
+                <a:latin typeface="Arial"/>
+              </a:defRPr>
+            </a:pPr>
+            <a:r>
+              <a:t>Tu primo tiene 14 años.</a:t>
+            </a:r>
+          </a:p>
+        </p:txBody>
+      </p:sp>
+      <p:sp>
+        <p:nvSpPr>
+          <p:cNvPr id="11" name="TextBox 10"/>
+          <p:cNvSpPr txBox="1"/>
+          <p:nvPr/>
+        </p:nvSpPr>
+        <p:spPr>
+          <a:xfrm>
+            <a:off x="640080" y="3657600"/>
+            <a:ext cx="10972800" cy="548640"/>
+          </a:xfrm>
+          <a:prstGeom prst="rect">
+            <a:avLst/>
+          </a:prstGeom>
+          <a:noFill/>
+        </p:spPr>
+        <p:txBody>
+          <a:bodyPr wrap="none">
+            <a:spAutoFit/>
+          </a:bodyPr>
+          <a:lstStyle/>
+          <a:p>
+            <a:pPr algn="l">
+              <a:defRPr sz="2000" b="0">
+                <a:solidFill>
+                  <a:srgbClr val="222222"/>
+                </a:solidFill>
+                <a:latin typeface="Arial"/>
+              </a:defRPr>
+            </a:pPr>
+            <a:r>
+              <a:t>Sus abuelos viven en Madrid.</a:t>
+            </a:r>
+          </a:p>
+        </p:txBody>
+      </p:sp>
+    </p:spTree>
+  </p:cSld>
+  <p:clrMapOvr>
+    <a:masterClrMapping/>
+  </p:clrMapOvr>
+</p:sld>
+</file>
+
+<file path=ppt/slides/slide7.xml><?xml version="1.0" encoding="utf-8"?>
+<p:sld xmlns:a="http://schemas.openxmlformats.org/drawingml/2006/main" xmlns:p="http://schemas.openxmlformats.org/presentationml/2006/main" xmlns:r="http://schemas.openxmlformats.org/officeDocument/2006/relationships">
+  <p:cSld>
+    <p:spTree>
+      <p:nvGrpSpPr>
+        <p:cNvPr id="1" name=""/>
+        <p:cNvGrpSpPr/>
+        <p:nvPr/>
+      </p:nvGrpSpPr>
+      <p:grpSpPr/>
+      <p:sp>
+        <p:nvSpPr>
+          <p:cNvPr id="2" name="Rectangle 1"/>
+          <p:cNvSpPr/>
+          <p:nvPr/>
+        </p:nvSpPr>
+        <p:spPr>
+          <a:xfrm>
+            <a:off x="0" y="0"/>
+            <a:ext cx="12191695" cy="457200"/>
+          </a:xfrm>
+          <a:prstGeom prst="rect">
+            <a:avLst/>
+          </a:prstGeom>
+          <a:solidFill>
+            <a:srgbClr val="C41E3A"/>
+          </a:solidFill>
+          <a:ln>
+            <a:noFill/>
+          </a:ln>
+        </p:spPr>
+        <p:style>
+          <a:lnRef idx="1">
+            <a:schemeClr val="accent1"/>
+          </a:lnRef>
+          <a:fillRef idx="3">
+            <a:schemeClr val="accent1"/>
+          </a:fillRef>
+          <a:effectRef idx="2">
+            <a:schemeClr val="accent1"/>
+          </a:effectRef>
+          <a:fontRef idx="minor">
+            <a:schemeClr val="lt1"/>
+          </a:fontRef>
+        </p:style>
+        <p:txBody>
+          <a:bodyPr rtlCol="0" anchor="ctr"/>
+          <a:lstStyle/>
+          <a:p>
+            <a:pPr algn="ctr"/>
+          </a:p>
+        </p:txBody>
+      </p:sp>
+      <p:sp>
+        <p:nvSpPr>
+          <p:cNvPr id="3" name="TextBox 2"/>
+          <p:cNvSpPr txBox="1"/>
+          <p:nvPr/>
+        </p:nvSpPr>
+        <p:spPr>
+          <a:xfrm>
+            <a:off x="274320" y="91440"/>
+            <a:ext cx="3657600" cy="274320"/>
+          </a:xfrm>
+          <a:prstGeom prst="rect">
+            <a:avLst/>
+          </a:prstGeom>
+          <a:noFill/>
+        </p:spPr>
+        <p:txBody>
+          <a:bodyPr wrap="none">
+            <a:spAutoFit/>
+          </a:bodyPr>
+          <a:lstStyle/>
+          <a:p>
+            <a:pPr algn="l">
+              <a:defRPr sz="1400" b="1">
+                <a:solidFill>
+                  <a:srgbClr val="FFFFFF"/>
+                </a:solidFill>
+                <a:latin typeface="Arial"/>
+              </a:defRPr>
+            </a:pPr>
+            <a:r>
+              <a:t>Spanisch Klasse 7 · LP-02c</a:t>
+            </a:r>
+          </a:p>
+        </p:txBody>
+      </p:sp>
+      <p:sp>
+        <p:nvSpPr>
+          <p:cNvPr id="4" name="Rectangle 3"/>
+          <p:cNvSpPr/>
+          <p:nvPr/>
+        </p:nvSpPr>
+        <p:spPr>
+          <a:xfrm>
+            <a:off x="0" y="6583680"/>
+            <a:ext cx="12191695" cy="274320"/>
+          </a:xfrm>
+          <a:prstGeom prst="rect">
+            <a:avLst/>
+          </a:prstGeom>
+          <a:solidFill>
+            <a:srgbClr val="F5F5F5"/>
+          </a:solidFill>
+          <a:ln>
+            <a:noFill/>
+          </a:ln>
+        </p:spPr>
+        <p:style>
+          <a:lnRef idx="1">
+            <a:schemeClr val="accent1"/>
+          </a:lnRef>
+          <a:fillRef idx="3">
+            <a:schemeClr val="accent1"/>
+          </a:fillRef>
+          <a:effectRef idx="2">
+            <a:schemeClr val="accent1"/>
+          </a:effectRef>
+          <a:fontRef idx="minor">
+            <a:schemeClr val="lt1"/>
+          </a:fontRef>
+        </p:style>
+        <p:txBody>
+          <a:bodyPr rtlCol="0" anchor="ctr"/>
+          <a:lstStyle/>
+          <a:p>
+            <a:pPr algn="ctr"/>
+          </a:p>
+        </p:txBody>
+      </p:sp>
+      <p:sp>
+        <p:nvSpPr>
+          <p:cNvPr id="5" name="TextBox 4"/>
+          <p:cNvSpPr txBox="1"/>
+          <p:nvPr/>
+        </p:nvSpPr>
+        <p:spPr>
+          <a:xfrm>
+            <a:off x="274320" y="6601968"/>
+            <a:ext cx="4572000" cy="228600"/>
+          </a:xfrm>
+          <a:prstGeom prst="rect">
+            <a:avLst/>
+          </a:prstGeom>
+          <a:noFill/>
+        </p:spPr>
+        <p:txBody>
+          <a:bodyPr wrap="none">
+            <a:spAutoFit/>
+          </a:bodyPr>
+          <a:lstStyle/>
+          <a:p>
+            <a:pPr algn="l">
+              <a:defRPr sz="1000" b="0">
+                <a:solidFill>
+                  <a:srgbClr val="555555"/>
+                </a:solidFill>
+                <a:latin typeface="Arial"/>
+              </a:defRPr>
+            </a:pPr>
+            <a:r>
+              <a:t>Mi familia</a:t>
+            </a:r>
+          </a:p>
+        </p:txBody>
+      </p:sp>
+      <p:sp>
+        <p:nvSpPr>
+          <p:cNvPr id="6" name="TextBox 5"/>
+          <p:cNvSpPr txBox="1"/>
+          <p:nvPr/>
+        </p:nvSpPr>
+        <p:spPr>
+          <a:xfrm>
+            <a:off x="9144000" y="6601968"/>
+            <a:ext cx="2743200" cy="228600"/>
+          </a:xfrm>
+          <a:prstGeom prst="rect">
+            <a:avLst/>
+          </a:prstGeom>
+          <a:noFill/>
+        </p:spPr>
+        <p:txBody>
+          <a:bodyPr wrap="none">
+            <a:spAutoFit/>
+          </a:bodyPr>
+          <a:lstStyle/>
+          <a:p>
+            <a:pPr algn="r">
+              <a:defRPr sz="1000" b="0">
+                <a:solidFill>
+                  <a:srgbClr val="555555"/>
+                </a:solidFill>
+                <a:latin typeface="Arial"/>
+              </a:defRPr>
+            </a:pPr>
+            <a:r>
+              <a:t>Sequenz 2</a:t>
+            </a:r>
+          </a:p>
+        </p:txBody>
+      </p:sp>
+      <p:sp>
+        <p:nvSpPr>
+          <p:cNvPr id="7" name="TextBox 6"/>
+          <p:cNvSpPr txBox="1"/>
+          <p:nvPr/>
+        </p:nvSpPr>
+        <p:spPr>
+          <a:xfrm>
+            <a:off x="457200" y="640080"/>
+            <a:ext cx="11274552" cy="731520"/>
+          </a:xfrm>
+          <a:prstGeom prst="rect">
+            <a:avLst/>
+          </a:prstGeom>
+          <a:noFill/>
+        </p:spPr>
+        <p:txBody>
+          <a:bodyPr wrap="none">
+            <a:spAutoFit/>
+          </a:bodyPr>
+          <a:lstStyle/>
+          <a:p>
+            <a:pPr algn="l">
+              <a:defRPr sz="3200" b="1">
+                <a:solidFill>
+                  <a:srgbClr val="C41E3A"/>
+                </a:solidFill>
+                <a:latin typeface="Arial"/>
+              </a:defRPr>
+            </a:pPr>
+            <a:r>
+              <a:t>📚 Haustiere</a:t>
+            </a:r>
+          </a:p>
+        </p:txBody>
+      </p:sp>
+      <p:sp>
+        <p:nvSpPr>
+          <p:cNvPr id="8" name="Rectangle 7"/>
+          <p:cNvSpPr/>
+          <p:nvPr/>
+        </p:nvSpPr>
+        <p:spPr>
+          <a:xfrm>
+            <a:off x="457200" y="1371600"/>
+            <a:ext cx="11274552" cy="594360"/>
+          </a:xfrm>
+          <a:prstGeom prst="rect">
+            <a:avLst/>
+          </a:prstGeom>
+          <a:solidFill>
+            <a:srgbClr val="C41E3A"/>
+          </a:solidFill>
+          <a:ln>
+            <a:noFill/>
+          </a:ln>
+        </p:spPr>
+        <p:style>
+          <a:lnRef idx="1">
+            <a:schemeClr val="accent1"/>
+          </a:lnRef>
+          <a:fillRef idx="3">
+            <a:schemeClr val="accent1"/>
+          </a:fillRef>
+          <a:effectRef idx="2">
+            <a:schemeClr val="accent1"/>
+          </a:effectRef>
+          <a:fontRef idx="minor">
+            <a:schemeClr val="lt1"/>
+          </a:fontRef>
+        </p:style>
+        <p:txBody>
+          <a:bodyPr rtlCol="0" anchor="ctr"/>
+          <a:lstStyle/>
+          <a:p>
+            <a:pPr algn="ctr"/>
+          </a:p>
+        </p:txBody>
+      </p:sp>
+      <p:sp>
+        <p:nvSpPr>
+          <p:cNvPr id="9" name="TextBox 8"/>
+          <p:cNvSpPr txBox="1"/>
+          <p:nvPr/>
+        </p:nvSpPr>
+        <p:spPr>
+          <a:xfrm>
+            <a:off x="640080" y="1481328"/>
+            <a:ext cx="5029200" cy="365760"/>
+          </a:xfrm>
+          <a:prstGeom prst="rect">
+            <a:avLst/>
+          </a:prstGeom>
+          <a:noFill/>
+        </p:spPr>
+        <p:txBody>
+          <a:bodyPr wrap="none">
+            <a:spAutoFit/>
+          </a:bodyPr>
+          <a:lstStyle/>
+          <a:p>
+            <a:pPr algn="l">
+              <a:defRPr sz="1800" b="1">
+                <a:solidFill>
+                  <a:srgbClr val="FFFFFF"/>
+                </a:solidFill>
+                <a:latin typeface="Arial"/>
+              </a:defRPr>
+            </a:pPr>
+            <a:r>
+              <a:t>Spanisch</a:t>
+            </a:r>
+          </a:p>
+        </p:txBody>
+      </p:sp>
+      <p:sp>
+        <p:nvSpPr>
+          <p:cNvPr id="10" name="TextBox 9"/>
+          <p:cNvSpPr txBox="1"/>
+          <p:nvPr/>
+        </p:nvSpPr>
+        <p:spPr>
+          <a:xfrm>
+            <a:off x="5943600" y="1481328"/>
+            <a:ext cx="5029200" cy="365760"/>
+          </a:xfrm>
+          <a:prstGeom prst="rect">
+            <a:avLst/>
+          </a:prstGeom>
+          <a:noFill/>
+        </p:spPr>
+        <p:txBody>
+          <a:bodyPr wrap="none">
+            <a:spAutoFit/>
+          </a:bodyPr>
+          <a:lstStyle/>
+          <a:p>
+            <a:pPr algn="l">
+              <a:defRPr sz="1800" b="1">
+                <a:solidFill>
+                  <a:srgbClr val="FFFFFF"/>
+                </a:solidFill>
+                <a:latin typeface="Arial"/>
+              </a:defRPr>
+            </a:pPr>
+            <a:r>
+              <a:t>Deutsch</a:t>
+            </a:r>
+          </a:p>
+        </p:txBody>
+      </p:sp>
+      <p:sp>
+        <p:nvSpPr>
+          <p:cNvPr id="11" name="TextBox 10"/>
+          <p:cNvSpPr txBox="1"/>
+          <p:nvPr/>
+        </p:nvSpPr>
+        <p:spPr>
+          <a:xfrm>
+            <a:off x="640080" y="2075688"/>
+            <a:ext cx="5029200" cy="365760"/>
+          </a:xfrm>
+          <a:prstGeom prst="rect">
+            <a:avLst/>
+          </a:prstGeom>
+          <a:noFill/>
+        </p:spPr>
+        <p:txBody>
+          <a:bodyPr wrap="none">
+            <a:spAutoFit/>
+          </a:bodyPr>
+          <a:lstStyle/>
+          <a:p>
+            <a:pPr algn="l">
+              <a:defRPr sz="2000" b="1">
+                <a:solidFill>
+                  <a:srgbClr val="C41E3A"/>
+                </a:solidFill>
+                <a:latin typeface="Arial"/>
+              </a:defRPr>
+            </a:pPr>
+            <a:r>
+              <a:t>el perro</a:t>
+            </a:r>
+          </a:p>
+        </p:txBody>
+      </p:sp>
+      <p:sp>
+        <p:nvSpPr>
+          <p:cNvPr id="12" name="TextBox 11"/>
+          <p:cNvSpPr txBox="1"/>
+          <p:nvPr/>
+        </p:nvSpPr>
+        <p:spPr>
+          <a:xfrm>
+            <a:off x="5943600" y="2075688"/>
+            <a:ext cx="5029200" cy="365760"/>
+          </a:xfrm>
+          <a:prstGeom prst="rect">
+            <a:avLst/>
+          </a:prstGeom>
+          <a:noFill/>
+        </p:spPr>
+        <p:txBody>
+          <a:bodyPr wrap="none">
+            <a:spAutoFit/>
+          </a:bodyPr>
+          <a:lstStyle/>
+          <a:p>
+            <a:pPr algn="l">
+              <a:defRPr sz="2000" b="0">
+                <a:solidFill>
+                  <a:srgbClr val="222222"/>
+                </a:solidFill>
+                <a:latin typeface="Arial"/>
+              </a:defRPr>
+            </a:pPr>
+            <a:r>
+              <a:t>der Hund</a:t>
+            </a:r>
+          </a:p>
+        </p:txBody>
+      </p:sp>
+      <p:sp>
+        <p:nvSpPr>
+          <p:cNvPr id="13" name="Rectangle 12"/>
+          <p:cNvSpPr/>
+          <p:nvPr/>
+        </p:nvSpPr>
+        <p:spPr>
+          <a:xfrm>
+            <a:off x="457200" y="2560320"/>
+            <a:ext cx="11274552" cy="594360"/>
+          </a:xfrm>
+          <a:prstGeom prst="rect">
+            <a:avLst/>
+          </a:prstGeom>
+          <a:solidFill>
+            <a:srgbClr val="F5F5F5"/>
+          </a:solidFill>
+          <a:ln>
+            <a:noFill/>
+          </a:ln>
+        </p:spPr>
+        <p:style>
+          <a:lnRef idx="1">
+            <a:schemeClr val="accent1"/>
+          </a:lnRef>
+          <a:fillRef idx="3">
+            <a:schemeClr val="accent1"/>
+          </a:fillRef>
+          <a:effectRef idx="2">
+            <a:schemeClr val="accent1"/>
+          </a:effectRef>
+          <a:fontRef idx="minor">
+            <a:schemeClr val="lt1"/>
+          </a:fontRef>
+        </p:style>
+        <p:txBody>
+          <a:bodyPr rtlCol="0" anchor="ctr"/>
+          <a:lstStyle/>
+          <a:p>
+            <a:pPr algn="ctr"/>
+          </a:p>
+        </p:txBody>
+      </p:sp>
+      <p:sp>
+        <p:nvSpPr>
+          <p:cNvPr id="14" name="TextBox 13"/>
+          <p:cNvSpPr txBox="1"/>
+          <p:nvPr/>
+        </p:nvSpPr>
+        <p:spPr>
+          <a:xfrm>
+            <a:off x="640080" y="2670048"/>
+            <a:ext cx="5029200" cy="365760"/>
+          </a:xfrm>
+          <a:prstGeom prst="rect">
+            <a:avLst/>
+          </a:prstGeom>
+          <a:noFill/>
+        </p:spPr>
+        <p:txBody>
+          <a:bodyPr wrap="none">
+            <a:spAutoFit/>
+          </a:bodyPr>
+          <a:lstStyle/>
+          <a:p>
+            <a:pPr algn="l">
+              <a:defRPr sz="2000" b="1">
+                <a:solidFill>
+                  <a:srgbClr val="C41E3A"/>
+                </a:solidFill>
+                <a:latin typeface="Arial"/>
+              </a:defRPr>
+            </a:pPr>
+            <a:r>
+              <a:t>el gato</a:t>
+            </a:r>
+          </a:p>
+        </p:txBody>
+      </p:sp>
+      <p:sp>
+        <p:nvSpPr>
+          <p:cNvPr id="15" name="TextBox 14"/>
+          <p:cNvSpPr txBox="1"/>
+          <p:nvPr/>
+        </p:nvSpPr>
+        <p:spPr>
+          <a:xfrm>
+            <a:off x="5943600" y="2670048"/>
+            <a:ext cx="5029200" cy="365760"/>
+          </a:xfrm>
+          <a:prstGeom prst="rect">
+            <a:avLst/>
+          </a:prstGeom>
+          <a:noFill/>
+        </p:spPr>
+        <p:txBody>
+          <a:bodyPr wrap="none">
+            <a:spAutoFit/>
+          </a:bodyPr>
+          <a:lstStyle/>
+          <a:p>
+            <a:pPr algn="l">
+              <a:defRPr sz="2000" b="0">
+                <a:solidFill>
+                  <a:srgbClr val="222222"/>
+                </a:solidFill>
+                <a:latin typeface="Arial"/>
+              </a:defRPr>
+            </a:pPr>
+            <a:r>
+              <a:t>die Katze</a:t>
+            </a:r>
+          </a:p>
+        </p:txBody>
+      </p:sp>
+      <p:sp>
+        <p:nvSpPr>
+          <p:cNvPr id="16" name="TextBox 15"/>
+          <p:cNvSpPr txBox="1"/>
+          <p:nvPr/>
+        </p:nvSpPr>
+        <p:spPr>
+          <a:xfrm>
+            <a:off x="640080" y="3264408"/>
+            <a:ext cx="5029200" cy="365760"/>
+          </a:xfrm>
+          <a:prstGeom prst="rect">
+            <a:avLst/>
+          </a:prstGeom>
+          <a:noFill/>
+        </p:spPr>
+        <p:txBody>
+          <a:bodyPr wrap="none">
+            <a:spAutoFit/>
+          </a:bodyPr>
+          <a:lstStyle/>
+          <a:p>
+            <a:pPr algn="l">
+              <a:defRPr sz="2000" b="1">
+                <a:solidFill>
+                  <a:srgbClr val="C41E3A"/>
+                </a:solidFill>
+                <a:latin typeface="Arial"/>
+              </a:defRPr>
+            </a:pPr>
+            <a:r>
+              <a:t>el pájaro</a:t>
+            </a:r>
+          </a:p>
+        </p:txBody>
+      </p:sp>
+      <p:sp>
+        <p:nvSpPr>
+          <p:cNvPr id="17" name="TextBox 16"/>
+          <p:cNvSpPr txBox="1"/>
+          <p:nvPr/>
+        </p:nvSpPr>
+        <p:spPr>
+          <a:xfrm>
+            <a:off x="5943600" y="3264408"/>
+            <a:ext cx="5029200" cy="365760"/>
+          </a:xfrm>
+          <a:prstGeom prst="rect">
+            <a:avLst/>
+          </a:prstGeom>
+          <a:noFill/>
+        </p:spPr>
+        <p:txBody>
+          <a:bodyPr wrap="none">
+            <a:spAutoFit/>
+          </a:bodyPr>
+          <a:lstStyle/>
+          <a:p>
+            <a:pPr algn="l">
+              <a:defRPr sz="2000" b="0">
+                <a:solidFill>
+                  <a:srgbClr val="222222"/>
+                </a:solidFill>
+                <a:latin typeface="Arial"/>
+              </a:defRPr>
+            </a:pPr>
+            <a:r>
+              <a:t>der Vogel</a:t>
+            </a:r>
+          </a:p>
+        </p:txBody>
+      </p:sp>
+      <p:sp>
+        <p:nvSpPr>
+          <p:cNvPr id="18" name="Rectangle 17"/>
+          <p:cNvSpPr/>
+          <p:nvPr/>
+        </p:nvSpPr>
+        <p:spPr>
+          <a:xfrm>
+            <a:off x="457200" y="5943600"/>
+            <a:ext cx="11274552" cy="548640"/>
+          </a:xfrm>
+          <a:prstGeom prst="rect">
+            <a:avLst/>
+          </a:prstGeom>
+          <a:solidFill>
+            <a:srgbClr val="FDF2F4"/>
+          </a:solidFill>
+          <a:ln>
+            <a:solidFill>
+              <a:srgbClr val="C41E3A"/>
+            </a:solidFill>
+          </a:ln>
+        </p:spPr>
+        <p:style>
+          <a:lnRef idx="1">
+            <a:schemeClr val="accent1"/>
+          </a:lnRef>
+          <a:fillRef idx="3">
+            <a:schemeClr val="accent1"/>
+          </a:fillRef>
+          <a:effectRef idx="2">
+            <a:schemeClr val="accent1"/>
+          </a:effectRef>
+          <a:fontRef idx="minor">
+            <a:schemeClr val="lt1"/>
+          </a:fontRef>
+        </p:style>
+        <p:txBody>
+          <a:bodyPr rtlCol="0" anchor="ctr"/>
+          <a:lstStyle/>
+          <a:p>
+            <a:pPr algn="ctr"/>
+          </a:p>
+        </p:txBody>
+      </p:sp>
+      <p:sp>
+        <p:nvSpPr>
+          <p:cNvPr id="19" name="TextBox 18"/>
+          <p:cNvSpPr txBox="1"/>
+          <p:nvPr/>
+        </p:nvSpPr>
+        <p:spPr>
+          <a:xfrm>
+            <a:off x="640080" y="6053328"/>
+            <a:ext cx="10972800" cy="365760"/>
+          </a:xfrm>
+          <a:prstGeom prst="rect">
+            <a:avLst/>
+          </a:prstGeom>
+          <a:noFill/>
+        </p:spPr>
+        <p:txBody>
+          <a:bodyPr wrap="none">
+            <a:spAutoFit/>
+          </a:bodyPr>
+          <a:lstStyle/>
+          <a:p>
+            <a:pPr algn="l">
+              <a:defRPr sz="1400" b="1">
+                <a:solidFill>
+                  <a:srgbClr val="C41E3A"/>
+                </a:solidFill>
+                <a:latin typeface="Arial"/>
+              </a:defRPr>
+            </a:pPr>
+            <a:r>
+              <a:t>📝 AB-02c: Kasten 1</a:t>
+            </a:r>
+          </a:p>
+        </p:txBody>
+      </p:sp>
+    </p:spTree>
+  </p:cSld>
+  <p:clrMapOvr>
+    <a:masterClrMapping/>
+  </p:clrMapOvr>
+</p:sld>
+</file>
+
+<file path=ppt/slides/slide8.xml><?xml version="1.0" encoding="utf-8"?>
+<p:sld xmlns:a="http://schemas.openxmlformats.org/drawingml/2006/main" xmlns:p="http://schemas.openxmlformats.org/presentationml/2006/main" xmlns:r="http://schemas.openxmlformats.org/officeDocument/2006/relationships">
+  <p:cSld>
+    <p:spTree>
+      <p:nvGrpSpPr>
+        <p:cNvPr id="1" name=""/>
+        <p:cNvGrpSpPr/>
+        <p:nvPr/>
+      </p:nvGrpSpPr>
+      <p:grpSpPr/>
+      <p:sp>
+        <p:nvSpPr>
+          <p:cNvPr id="2" name="Rectangle 1"/>
+          <p:cNvSpPr/>
+          <p:nvPr/>
+        </p:nvSpPr>
+        <p:spPr>
+          <a:xfrm>
+            <a:off x="0" y="0"/>
+            <a:ext cx="12191695" cy="457200"/>
+          </a:xfrm>
+          <a:prstGeom prst="rect">
+            <a:avLst/>
+          </a:prstGeom>
+          <a:solidFill>
+            <a:srgbClr val="C41E3A"/>
+          </a:solidFill>
+          <a:ln>
+            <a:noFill/>
+          </a:ln>
+        </p:spPr>
+        <p:style>
+          <a:lnRef idx="1">
+            <a:schemeClr val="accent1"/>
+          </a:lnRef>
+          <a:fillRef idx="3">
+            <a:schemeClr val="accent1"/>
+          </a:fillRef>
+          <a:effectRef idx="2">
+            <a:schemeClr val="accent1"/>
+          </a:effectRef>
+          <a:fontRef idx="minor">
+            <a:schemeClr val="lt1"/>
+          </a:fontRef>
+        </p:style>
+        <p:txBody>
+          <a:bodyPr rtlCol="0" anchor="ctr"/>
+          <a:lstStyle/>
+          <a:p>
+            <a:pPr algn="ctr"/>
+          </a:p>
+        </p:txBody>
+      </p:sp>
+      <p:sp>
+        <p:nvSpPr>
+          <p:cNvPr id="3" name="TextBox 2"/>
+          <p:cNvSpPr txBox="1"/>
+          <p:nvPr/>
+        </p:nvSpPr>
+        <p:spPr>
+          <a:xfrm>
+            <a:off x="274320" y="91440"/>
+            <a:ext cx="3657600" cy="274320"/>
+          </a:xfrm>
+          <a:prstGeom prst="rect">
+            <a:avLst/>
+          </a:prstGeom>
+          <a:noFill/>
+        </p:spPr>
+        <p:txBody>
+          <a:bodyPr wrap="none">
+            <a:spAutoFit/>
+          </a:bodyPr>
+          <a:lstStyle/>
+          <a:p>
+            <a:pPr algn="l">
+              <a:defRPr sz="1400" b="1">
+                <a:solidFill>
+                  <a:srgbClr val="FFFFFF"/>
+                </a:solidFill>
+                <a:latin typeface="Arial"/>
+              </a:defRPr>
+            </a:pPr>
+            <a:r>
+              <a:t>Spanisch Klasse 7 · LP-02c</a:t>
+            </a:r>
+          </a:p>
+        </p:txBody>
+      </p:sp>
+      <p:sp>
+        <p:nvSpPr>
+          <p:cNvPr id="4" name="Rectangle 3"/>
+          <p:cNvSpPr/>
+          <p:nvPr/>
+        </p:nvSpPr>
+        <p:spPr>
+          <a:xfrm>
+            <a:off x="0" y="6583680"/>
+            <a:ext cx="12191695" cy="274320"/>
+          </a:xfrm>
+          <a:prstGeom prst="rect">
+            <a:avLst/>
+          </a:prstGeom>
+          <a:solidFill>
+            <a:srgbClr val="F5F5F5"/>
+          </a:solidFill>
+          <a:ln>
+            <a:noFill/>
+          </a:ln>
+        </p:spPr>
+        <p:style>
+          <a:lnRef idx="1">
+            <a:schemeClr val="accent1"/>
+          </a:lnRef>
+          <a:fillRef idx="3">
+            <a:schemeClr val="accent1"/>
+          </a:fillRef>
+          <a:effectRef idx="2">
+            <a:schemeClr val="accent1"/>
+          </a:effectRef>
+          <a:fontRef idx="minor">
+            <a:schemeClr val="lt1"/>
+          </a:fontRef>
+        </p:style>
+        <p:txBody>
+          <a:bodyPr rtlCol="0" anchor="ctr"/>
+          <a:lstStyle/>
+          <a:p>
+            <a:pPr algn="ctr"/>
+          </a:p>
+        </p:txBody>
+      </p:sp>
+      <p:sp>
+        <p:nvSpPr>
+          <p:cNvPr id="5" name="TextBox 4"/>
+          <p:cNvSpPr txBox="1"/>
+          <p:nvPr/>
+        </p:nvSpPr>
+        <p:spPr>
+          <a:xfrm>
+            <a:off x="274320" y="6601968"/>
+            <a:ext cx="4572000" cy="228600"/>
+          </a:xfrm>
+          <a:prstGeom prst="rect">
+            <a:avLst/>
+          </a:prstGeom>
+          <a:noFill/>
+        </p:spPr>
+        <p:txBody>
+          <a:bodyPr wrap="none">
+            <a:spAutoFit/>
+          </a:bodyPr>
+          <a:lstStyle/>
+          <a:p>
+            <a:pPr algn="l">
+              <a:defRPr sz="1000" b="0">
+                <a:solidFill>
+                  <a:srgbClr val="555555"/>
+                </a:solidFill>
+                <a:latin typeface="Arial"/>
+              </a:defRPr>
+            </a:pPr>
+            <a:r>
+              <a:t>Mi familia</a:t>
+            </a:r>
+          </a:p>
+        </p:txBody>
+      </p:sp>
+      <p:sp>
+        <p:nvSpPr>
+          <p:cNvPr id="6" name="TextBox 5"/>
+          <p:cNvSpPr txBox="1"/>
+          <p:nvPr/>
+        </p:nvSpPr>
+        <p:spPr>
+          <a:xfrm>
+            <a:off x="9144000" y="6601968"/>
+            <a:ext cx="2743200" cy="228600"/>
+          </a:xfrm>
+          <a:prstGeom prst="rect">
+            <a:avLst/>
+          </a:prstGeom>
+          <a:noFill/>
+        </p:spPr>
+        <p:txBody>
+          <a:bodyPr wrap="none">
+            <a:spAutoFit/>
+          </a:bodyPr>
+          <a:lstStyle/>
+          <a:p>
+            <a:pPr algn="r">
+              <a:defRPr sz="1000" b="0">
+                <a:solidFill>
+                  <a:srgbClr val="555555"/>
+                </a:solidFill>
+                <a:latin typeface="Arial"/>
+              </a:defRPr>
+            </a:pPr>
+            <a:r>
+              <a:t>Sequenz 2</a:t>
+            </a:r>
+          </a:p>
+        </p:txBody>
+      </p:sp>
+      <p:sp>
+        <p:nvSpPr>
+          <p:cNvPr id="7" name="TextBox 6"/>
+          <p:cNvSpPr txBox="1"/>
+          <p:nvPr/>
+        </p:nvSpPr>
+        <p:spPr>
+          <a:xfrm>
+            <a:off x="457200" y="640080"/>
+            <a:ext cx="11274552" cy="731520"/>
+          </a:xfrm>
+          <a:prstGeom prst="rect">
+            <a:avLst/>
+          </a:prstGeom>
+          <a:noFill/>
+        </p:spPr>
+        <p:txBody>
+          <a:bodyPr wrap="none">
+            <a:spAutoFit/>
+          </a:bodyPr>
+          <a:lstStyle/>
+          <a:p>
+            <a:pPr algn="l">
+              <a:defRPr sz="3200" b="1">
+                <a:solidFill>
+                  <a:srgbClr val="C41E3A"/>
+                </a:solidFill>
+                <a:latin typeface="Arial"/>
+              </a:defRPr>
+            </a:pPr>
+            <a:r>
+              <a:t>Meine Familie beschreiben</a:t>
+            </a:r>
+          </a:p>
+        </p:txBody>
+      </p:sp>
+      <p:sp>
+        <p:nvSpPr>
+          <p:cNvPr id="8" name="TextBox 7"/>
+          <p:cNvSpPr txBox="1"/>
+          <p:nvPr/>
+        </p:nvSpPr>
+        <p:spPr>
+          <a:xfrm>
+            <a:off x="640080" y="1463040"/>
+            <a:ext cx="10972800" cy="548640"/>
+          </a:xfrm>
+          <a:prstGeom prst="rect">
+            <a:avLst/>
+          </a:prstGeom>
+          <a:noFill/>
+        </p:spPr>
+        <p:txBody>
+          <a:bodyPr wrap="none">
+            <a:spAutoFit/>
+          </a:bodyPr>
+          <a:lstStyle/>
+          <a:p>
+            <a:pPr algn="l">
+              <a:defRPr sz="2000" b="0">
+                <a:solidFill>
+                  <a:srgbClr val="222222"/>
+                </a:solidFill>
+                <a:latin typeface="Arial"/>
+              </a:defRPr>
+            </a:pPr>
+            <a:r>
+              <a:t>Mi familia es pequeña/grande.</a:t>
+            </a:r>
+          </a:p>
+        </p:txBody>
+      </p:sp>
+      <p:sp>
+        <p:nvSpPr>
+          <p:cNvPr id="9" name="TextBox 8"/>
+          <p:cNvSpPr txBox="1"/>
+          <p:nvPr/>
+        </p:nvSpPr>
+        <p:spPr>
+          <a:xfrm>
+            <a:off x="640080" y="2194560"/>
+            <a:ext cx="10972800" cy="548640"/>
+          </a:xfrm>
+          <a:prstGeom prst="rect">
+            <a:avLst/>
+          </a:prstGeom>
+          <a:noFill/>
+        </p:spPr>
+        <p:txBody>
+          <a:bodyPr wrap="none">
+            <a:spAutoFit/>
+          </a:bodyPr>
+          <a:lstStyle/>
+          <a:p>
+            <a:pPr algn="l">
+              <a:defRPr sz="2000" b="0">
+                <a:solidFill>
+                  <a:srgbClr val="222222"/>
+                </a:solidFill>
+                <a:latin typeface="Arial"/>
+              </a:defRPr>
+            </a:pPr>
+            <a:r>
+              <a:t>Tengo un/a hermano/a.</a:t>
+            </a:r>
+          </a:p>
+        </p:txBody>
+      </p:sp>
+      <p:sp>
+        <p:nvSpPr>
+          <p:cNvPr id="10" name="TextBox 9"/>
+          <p:cNvSpPr txBox="1"/>
+          <p:nvPr/>
+        </p:nvSpPr>
+        <p:spPr>
+          <a:xfrm>
+            <a:off x="640080" y="2926080"/>
+            <a:ext cx="10972800" cy="548640"/>
+          </a:xfrm>
+          <a:prstGeom prst="rect">
+            <a:avLst/>
+          </a:prstGeom>
+          <a:noFill/>
+        </p:spPr>
+        <p:txBody>
+          <a:bodyPr wrap="none">
+            <a:spAutoFit/>
+          </a:bodyPr>
+          <a:lstStyle/>
+          <a:p>
+            <a:pPr algn="l">
+              <a:defRPr sz="2000" b="0">
+                <a:solidFill>
+                  <a:srgbClr val="222222"/>
+                </a:solidFill>
+                <a:latin typeface="Arial"/>
+              </a:defRPr>
+            </a:pPr>
+            <a:r>
+              <a:t>No tengo hermanos. (keine)</a:t>
+            </a:r>
+          </a:p>
+        </p:txBody>
+      </p:sp>
+      <p:sp>
+        <p:nvSpPr>
+          <p:cNvPr id="11" name="TextBox 10"/>
+          <p:cNvSpPr txBox="1"/>
+          <p:nvPr/>
+        </p:nvSpPr>
+        <p:spPr>
+          <a:xfrm>
+            <a:off x="640080" y="3657600"/>
+            <a:ext cx="10972800" cy="548640"/>
+          </a:xfrm>
+          <a:prstGeom prst="rect">
+            <a:avLst/>
+          </a:prstGeom>
+          <a:noFill/>
+        </p:spPr>
+        <p:txBody>
+          <a:bodyPr wrap="none">
+            <a:spAutoFit/>
+          </a:bodyPr>
+          <a:lstStyle/>
+          <a:p>
+            <a:pPr algn="l">
+              <a:defRPr sz="2000" b="0">
+                <a:solidFill>
+                  <a:srgbClr val="222222"/>
+                </a:solidFill>
+                <a:latin typeface="Arial"/>
+              </a:defRPr>
+            </a:pPr>
+            <a:r>
+              <a:t>Tenemos un perro.</a:t>
+            </a:r>
+          </a:p>
+        </p:txBody>
+      </p:sp>
+    </p:spTree>
+  </p:cSld>
+  <p:clrMapOvr>
+    <a:masterClrMapping/>
+  </p:clrMapOvr>
+</p:sld>
+</file>
+
+<file path=ppt/slides/slide9.xml><?xml version="1.0" encoding="utf-8"?>
+<p:sld xmlns:a="http://schemas.openxmlformats.org/drawingml/2006/main" xmlns:p="http://schemas.openxmlformats.org/presentationml/2006/main" xmlns:r="http://schemas.openxmlformats.org/officeDocument/2006/relationships">
+  <p:cSld>
+    <p:spTree>
+      <p:nvGrpSpPr>
+        <p:cNvPr id="1" name=""/>
+        <p:cNvGrpSpPr/>
+        <p:nvPr/>
+      </p:nvGrpSpPr>
+      <p:grpSpPr/>
+      <p:sp>
+        <p:nvSpPr>
+          <p:cNvPr id="2" name="Rectangle 1"/>
+          <p:cNvSpPr/>
+          <p:nvPr/>
+        </p:nvSpPr>
+        <p:spPr>
+          <a:xfrm>
+            <a:off x="0" y="0"/>
+            <a:ext cx="12191695" cy="457200"/>
+          </a:xfrm>
+          <a:prstGeom prst="rect">
+            <a:avLst/>
+          </a:prstGeom>
+          <a:solidFill>
+            <a:srgbClr val="C41E3A"/>
+          </a:solidFill>
+          <a:ln>
+            <a:noFill/>
+          </a:ln>
+        </p:spPr>
+        <p:style>
+          <a:lnRef idx="1">
+            <a:schemeClr val="accent1"/>
+          </a:lnRef>
+          <a:fillRef idx="3">
+            <a:schemeClr val="accent1"/>
+          </a:fillRef>
+          <a:effectRef idx="2">
+            <a:schemeClr val="accent1"/>
+          </a:effectRef>
+          <a:fontRef idx="minor">
+            <a:schemeClr val="lt1"/>
+          </a:fontRef>
+        </p:style>
+        <p:txBody>
+          <a:bodyPr rtlCol="0" anchor="ctr"/>
+          <a:lstStyle/>
+          <a:p>
+            <a:pPr algn="ctr"/>
+          </a:p>
+        </p:txBody>
+      </p:sp>
+      <p:sp>
+        <p:nvSpPr>
+          <p:cNvPr id="3" name="TextBox 2"/>
+          <p:cNvSpPr txBox="1"/>
+          <p:nvPr/>
+        </p:nvSpPr>
+        <p:spPr>
+          <a:xfrm>
+            <a:off x="274320" y="91440"/>
+            <a:ext cx="3657600" cy="274320"/>
+          </a:xfrm>
+          <a:prstGeom prst="rect">
+            <a:avLst/>
+          </a:prstGeom>
+          <a:noFill/>
+        </p:spPr>
+        <p:txBody>
+          <a:bodyPr wrap="none">
+            <a:spAutoFit/>
+          </a:bodyPr>
+          <a:lstStyle/>
+          <a:p>
+            <a:pPr algn="l">
+              <a:defRPr sz="1400" b="1">
+                <a:solidFill>
+                  <a:srgbClr val="FFFFFF"/>
+                </a:solidFill>
+                <a:latin typeface="Arial"/>
+              </a:defRPr>
+            </a:pPr>
+            <a:r>
+              <a:t>Spanisch Klasse 7 · LP-02c</a:t>
+            </a:r>
+          </a:p>
+        </p:txBody>
+      </p:sp>
+      <p:sp>
+        <p:nvSpPr>
+          <p:cNvPr id="4" name="Rectangle 3"/>
+          <p:cNvSpPr/>
+          <p:nvPr/>
+        </p:nvSpPr>
+        <p:spPr>
+          <a:xfrm>
+            <a:off x="0" y="6583680"/>
+            <a:ext cx="12191695" cy="274320"/>
+          </a:xfrm>
+          <a:prstGeom prst="rect">
+            <a:avLst/>
+          </a:prstGeom>
+          <a:solidFill>
+            <a:srgbClr val="F5F5F5"/>
+          </a:solidFill>
+          <a:ln>
+            <a:noFill/>
+          </a:ln>
+        </p:spPr>
+        <p:style>
+          <a:lnRef idx="1">
+            <a:schemeClr val="accent1"/>
+          </a:lnRef>
+          <a:fillRef idx="3">
+            <a:schemeClr val="accent1"/>
+          </a:fillRef>
+          <a:effectRef idx="2">
+            <a:schemeClr val="accent1"/>
+          </a:effectRef>
+          <a:fontRef idx="minor">
+            <a:schemeClr val="lt1"/>
+          </a:fontRef>
+        </p:style>
+        <p:txBody>
+          <a:bodyPr rtlCol="0" anchor="ctr"/>
+          <a:lstStyle/>
+          <a:p>
+            <a:pPr algn="ctr"/>
+          </a:p>
+        </p:txBody>
+      </p:sp>
+      <p:sp>
+        <p:nvSpPr>
+          <p:cNvPr id="5" name="TextBox 4"/>
+          <p:cNvSpPr txBox="1"/>
+          <p:nvPr/>
+        </p:nvSpPr>
+        <p:spPr>
+          <a:xfrm>
+            <a:off x="274320" y="6601968"/>
+            <a:ext cx="4572000" cy="228600"/>
+          </a:xfrm>
+          <a:prstGeom prst="rect">
+            <a:avLst/>
+          </a:prstGeom>
+          <a:noFill/>
+        </p:spPr>
+        <p:txBody>
+          <a:bodyPr wrap="none">
+            <a:spAutoFit/>
+          </a:bodyPr>
+          <a:lstStyle/>
+          <a:p>
+            <a:pPr algn="l">
+              <a:defRPr sz="1000" b="0">
+                <a:solidFill>
+                  <a:srgbClr val="555555"/>
+                </a:solidFill>
+                <a:latin typeface="Arial"/>
+              </a:defRPr>
+            </a:pPr>
+            <a:r>
+              <a:t>Mi familia</a:t>
+            </a:r>
+          </a:p>
+        </p:txBody>
+      </p:sp>
+      <p:sp>
+        <p:nvSpPr>
+          <p:cNvPr id="6" name="TextBox 5"/>
+          <p:cNvSpPr txBox="1"/>
+          <p:nvPr/>
+        </p:nvSpPr>
+        <p:spPr>
+          <a:xfrm>
+            <a:off x="9144000" y="6601968"/>
+            <a:ext cx="2743200" cy="228600"/>
+          </a:xfrm>
+          <a:prstGeom prst="rect">
+            <a:avLst/>
+          </a:prstGeom>
+          <a:noFill/>
+        </p:spPr>
+        <p:txBody>
+          <a:bodyPr wrap="none">
+            <a:spAutoFit/>
+          </a:bodyPr>
+          <a:lstStyle/>
+          <a:p>
+            <a:pPr algn="r">
+              <a:defRPr sz="1000" b="0">
+                <a:solidFill>
+                  <a:srgbClr val="555555"/>
+                </a:solidFill>
+                <a:latin typeface="Arial"/>
+              </a:defRPr>
+            </a:pPr>
+            <a:r>
+              <a:t>Sequenz 2</a:t>
+            </a:r>
+          </a:p>
+        </p:txBody>
+      </p:sp>
+      <p:sp>
+        <p:nvSpPr>
+          <p:cNvPr id="7" name="Rectangle 6"/>
+          <p:cNvSpPr/>
+          <p:nvPr/>
+        </p:nvSpPr>
+        <p:spPr>
+          <a:xfrm>
+            <a:off x="457200" y="640080"/>
+            <a:ext cx="1828800" cy="457200"/>
+          </a:xfrm>
+          <a:prstGeom prst="rect">
+            <a:avLst/>
+          </a:prstGeom>
+          <a:solidFill>
+            <a:srgbClr val="C41E3A"/>
+          </a:solidFill>
+          <a:ln>
+            <a:noFill/>
+          </a:ln>
+        </p:spPr>
+        <p:style>
+          <a:lnRef idx="1">
+            <a:schemeClr val="accent1"/>
+          </a:lnRef>
+          <a:fillRef idx="3">
+            <a:schemeClr val="accent1"/>
+          </a:fillRef>
+          <a:effectRef idx="2">
+            <a:schemeClr val="accent1"/>
+          </a:effectRef>
+          <a:fontRef idx="minor">
+            <a:schemeClr val="lt1"/>
+          </a:fontRef>
+        </p:style>
+        <p:txBody>
+          <a:bodyPr rtlCol="0" anchor="ctr"/>
+          <a:lstStyle/>
+          <a:p>
+            <a:pPr algn="ctr"/>
+          </a:p>
+        </p:txBody>
+      </p:sp>
+      <p:sp>
+        <p:nvSpPr>
           <p:cNvPr id="8" name="TextBox 7"/>
           <p:cNvSpPr txBox="1"/>
           <p:nvPr/>
@@ -5090,7 +9099,7 @@
               </a:defRPr>
             </a:pPr>
             <a:r>
-              <a:t>HAUSAUFGABE</a:t>
+              <a:t>ÜBUNG</a:t>
             </a:r>
           </a:p>
         </p:txBody>
@@ -5126,7 +9135,7 @@
               </a:defRPr>
             </a:pPr>
             <a:r>
-              <a:t>📚 Para casa</a:t>
+              <a:t>✏️ Übung: Possessiv ergänzen</a:t>
             </a:r>
           </a:p>
         </p:txBody>
@@ -5139,30 +9148,30 @@
         </p:nvSpPr>
         <p:spPr>
           <a:xfrm>
-            <a:off x="640080" y="2103120"/>
-            <a:ext cx="457200" cy="457200"/>
-          </a:xfrm>
-          <a:prstGeom prst="rect">
-            <a:avLst/>
-          </a:prstGeom>
-          <a:noFill/>
-        </p:spPr>
-        <p:txBody>
-          <a:bodyPr wrap="none">
-            <a:spAutoFit/>
-          </a:bodyPr>
-          <a:lstStyle/>
-          <a:p>
-            <a:pPr algn="l">
-              <a:defRPr sz="2400" b="1">
-                <a:solidFill>
-                  <a:srgbClr val="2A7A4B"/>
-                </a:solidFill>
-                <a:latin typeface="Arial"/>
-              </a:defRPr>
-            </a:pPr>
-            <a:r>
-              <a:t>✓</a:t>
+            <a:off x="640080" y="2011680"/>
+            <a:ext cx="5029200" cy="548640"/>
+          </a:xfrm>
+          <a:prstGeom prst="rect">
+            <a:avLst/>
+          </a:prstGeom>
+          <a:noFill/>
+        </p:spPr>
+        <p:txBody>
+          <a:bodyPr wrap="none">
+            <a:spAutoFit/>
+          </a:bodyPr>
+          <a:lstStyle/>
+          <a:p>
+            <a:pPr algn="l">
+              <a:defRPr sz="2200" b="1">
+                <a:solidFill>
+                  <a:srgbClr val="C41E3A"/>
+                </a:solidFill>
+                <a:latin typeface="Arial"/>
+              </a:defRPr>
+            </a:pPr>
+            <a:r>
+              <a:t>___ hermana (ich)</a:t>
             </a:r>
           </a:p>
         </p:txBody>
@@ -5175,30 +9184,30 @@
         </p:nvSpPr>
         <p:spPr>
           <a:xfrm>
-            <a:off x="1188720" y="2103120"/>
-            <a:ext cx="10058400" cy="457200"/>
-          </a:xfrm>
-          <a:prstGeom prst="rect">
-            <a:avLst/>
-          </a:prstGeom>
-          <a:noFill/>
-        </p:spPr>
-        <p:txBody>
-          <a:bodyPr wrap="none">
-            <a:spAutoFit/>
-          </a:bodyPr>
-          <a:lstStyle/>
-          <a:p>
-            <a:pPr algn="l">
-              <a:defRPr sz="2000" b="0">
-                <a:solidFill>
-                  <a:srgbClr val="222222"/>
-                </a:solidFill>
-                <a:latin typeface="Arial"/>
-              </a:defRPr>
-            </a:pPr>
-            <a:r>
-              <a:t>Possessivbegleiter lernen</a:t>
+            <a:off x="5943600" y="2011680"/>
+            <a:ext cx="5029200" cy="548640"/>
+          </a:xfrm>
+          <a:prstGeom prst="rect">
+            <a:avLst/>
+          </a:prstGeom>
+          <a:noFill/>
+        </p:spPr>
+        <p:txBody>
+          <a:bodyPr wrap="none">
+            <a:spAutoFit/>
+          </a:bodyPr>
+          <a:lstStyle/>
+          <a:p>
+            <a:pPr algn="l">
+              <a:defRPr sz="2200" b="0">
+                <a:solidFill>
+                  <a:srgbClr val="888888"/>
+                </a:solidFill>
+                <a:latin typeface="Arial"/>
+              </a:defRPr>
+            </a:pPr>
+            <a:r>
+              <a:t>___</a:t>
             </a:r>
           </a:p>
         </p:txBody>
@@ -5211,30 +9220,30 @@
         </p:nvSpPr>
         <p:spPr>
           <a:xfrm>
-            <a:off x="640080" y="2926079"/>
-            <a:ext cx="457200" cy="457200"/>
-          </a:xfrm>
-          <a:prstGeom prst="rect">
-            <a:avLst/>
-          </a:prstGeom>
-          <a:noFill/>
-        </p:spPr>
-        <p:txBody>
-          <a:bodyPr wrap="none">
-            <a:spAutoFit/>
-          </a:bodyPr>
-          <a:lstStyle/>
-          <a:p>
-            <a:pPr algn="l">
-              <a:defRPr sz="2400" b="1">
-                <a:solidFill>
-                  <a:srgbClr val="2A7A4B"/>
-                </a:solidFill>
-                <a:latin typeface="Arial"/>
-              </a:defRPr>
-            </a:pPr>
-            <a:r>
-              <a:t>✓</a:t>
+            <a:off x="640080" y="2926080"/>
+            <a:ext cx="5029200" cy="548640"/>
+          </a:xfrm>
+          <a:prstGeom prst="rect">
+            <a:avLst/>
+          </a:prstGeom>
+          <a:noFill/>
+        </p:spPr>
+        <p:txBody>
+          <a:bodyPr wrap="none">
+            <a:spAutoFit/>
+          </a:bodyPr>
+          <a:lstStyle/>
+          <a:p>
+            <a:pPr algn="l">
+              <a:defRPr sz="2200" b="1">
+                <a:solidFill>
+                  <a:srgbClr val="C41E3A"/>
+                </a:solidFill>
+                <a:latin typeface="Arial"/>
+              </a:defRPr>
+            </a:pPr>
+            <a:r>
+              <a:t>___ padres (du)</a:t>
             </a:r>
           </a:p>
         </p:txBody>
@@ -5247,30 +9256,30 @@
         </p:nvSpPr>
         <p:spPr>
           <a:xfrm>
-            <a:off x="1188720" y="2926079"/>
-            <a:ext cx="10058400" cy="457200"/>
-          </a:xfrm>
-          <a:prstGeom prst="rect">
-            <a:avLst/>
-          </a:prstGeom>
-          <a:noFill/>
-        </p:spPr>
-        <p:txBody>
-          <a:bodyPr wrap="none">
-            <a:spAutoFit/>
-          </a:bodyPr>
-          <a:lstStyle/>
-          <a:p>
-            <a:pPr algn="l">
-              <a:defRPr sz="2000" b="0">
-                <a:solidFill>
-                  <a:srgbClr val="222222"/>
-                </a:solidFill>
-                <a:latin typeface="Arial"/>
-              </a:defRPr>
-            </a:pPr>
-            <a:r>
-              <a:t>Familie beschreiben</a:t>
+            <a:off x="5943600" y="2926080"/>
+            <a:ext cx="5029200" cy="548640"/>
+          </a:xfrm>
+          <a:prstGeom prst="rect">
+            <a:avLst/>
+          </a:prstGeom>
+          <a:noFill/>
+        </p:spPr>
+        <p:txBody>
+          <a:bodyPr wrap="none">
+            <a:spAutoFit/>
+          </a:bodyPr>
+          <a:lstStyle/>
+          <a:p>
+            <a:pPr algn="l">
+              <a:defRPr sz="2200" b="0">
+                <a:solidFill>
+                  <a:srgbClr val="888888"/>
+                </a:solidFill>
+                <a:latin typeface="Arial"/>
+              </a:defRPr>
+            </a:pPr>
+            <a:r>
+              <a:t>___</a:t>
             </a:r>
           </a:p>
         </p:txBody>
@@ -5283,22 +9292,139 @@
         </p:nvSpPr>
         <p:spPr>
           <a:xfrm>
-            <a:off x="457200" y="5760720"/>
+            <a:off x="640080" y="3840480"/>
+            <a:ext cx="5029200" cy="548640"/>
+          </a:xfrm>
+          <a:prstGeom prst="rect">
+            <a:avLst/>
+          </a:prstGeom>
+          <a:noFill/>
+        </p:spPr>
+        <p:txBody>
+          <a:bodyPr wrap="none">
+            <a:spAutoFit/>
+          </a:bodyPr>
+          <a:lstStyle/>
+          <a:p>
+            <a:pPr algn="l">
+              <a:defRPr sz="2200" b="1">
+                <a:solidFill>
+                  <a:srgbClr val="C41E3A"/>
+                </a:solidFill>
+                <a:latin typeface="Arial"/>
+              </a:defRPr>
+            </a:pPr>
+            <a:r>
+              <a:t>___ abuelos (er)</a:t>
+            </a:r>
+          </a:p>
+        </p:txBody>
+      </p:sp>
+      <p:sp>
+        <p:nvSpPr>
+          <p:cNvPr id="15" name="TextBox 14"/>
+          <p:cNvSpPr txBox="1"/>
+          <p:nvPr/>
+        </p:nvSpPr>
+        <p:spPr>
+          <a:xfrm>
+            <a:off x="5943600" y="3840480"/>
+            <a:ext cx="5029200" cy="548640"/>
+          </a:xfrm>
+          <a:prstGeom prst="rect">
+            <a:avLst/>
+          </a:prstGeom>
+          <a:noFill/>
+        </p:spPr>
+        <p:txBody>
+          <a:bodyPr wrap="none">
+            <a:spAutoFit/>
+          </a:bodyPr>
+          <a:lstStyle/>
+          <a:p>
+            <a:pPr algn="l">
+              <a:defRPr sz="2200" b="0">
+                <a:solidFill>
+                  <a:srgbClr val="888888"/>
+                </a:solidFill>
+                <a:latin typeface="Arial"/>
+              </a:defRPr>
+            </a:pPr>
+            <a:r>
+              <a:t>___</a:t>
+            </a:r>
+          </a:p>
+        </p:txBody>
+      </p:sp>
+      <p:sp>
+        <p:nvSpPr>
+          <p:cNvPr id="16" name="Rectangle 15"/>
+          <p:cNvSpPr/>
+          <p:nvPr/>
+        </p:nvSpPr>
+        <p:spPr>
+          <a:xfrm>
+            <a:off x="457200" y="5943600"/>
             <a:ext cx="11274552" cy="548640"/>
           </a:xfrm>
           <a:prstGeom prst="rect">
             <a:avLst/>
           </a:prstGeom>
-          <a:noFill/>
-        </p:spPr>
-        <p:txBody>
-          <a:bodyPr wrap="none">
-            <a:spAutoFit/>
-          </a:bodyPr>
-          <a:lstStyle/>
-          <a:p>
-            <a:pPr algn="ctr">
-              <a:defRPr sz="3200" b="1">
+          <a:solidFill>
+            <a:srgbClr val="FDF2F4"/>
+          </a:solidFill>
+          <a:ln>
+            <a:solidFill>
+              <a:srgbClr val="C41E3A"/>
+            </a:solidFill>
+          </a:ln>
+        </p:spPr>
+        <p:style>
+          <a:lnRef idx="1">
+            <a:schemeClr val="accent1"/>
+          </a:lnRef>
+          <a:fillRef idx="3">
+            <a:schemeClr val="accent1"/>
+          </a:fillRef>
+          <a:effectRef idx="2">
+            <a:schemeClr val="accent1"/>
+          </a:effectRef>
+          <a:fontRef idx="minor">
+            <a:schemeClr val="lt1"/>
+          </a:fontRef>
+        </p:style>
+        <p:txBody>
+          <a:bodyPr rtlCol="0" anchor="ctr"/>
+          <a:lstStyle/>
+          <a:p>
+            <a:pPr algn="ctr"/>
+          </a:p>
+        </p:txBody>
+      </p:sp>
+      <p:sp>
+        <p:nvSpPr>
+          <p:cNvPr id="17" name="TextBox 16"/>
+          <p:cNvSpPr txBox="1"/>
+          <p:nvPr/>
+        </p:nvSpPr>
+        <p:spPr>
+          <a:xfrm>
+            <a:off x="640080" y="6053328"/>
+            <a:ext cx="10972800" cy="365760"/>
+          </a:xfrm>
+          <a:prstGeom prst="rect">
+            <a:avLst/>
+          </a:prstGeom>
+          <a:noFill/>
+        </p:spPr>
+        <p:txBody>
+          <a:bodyPr wrap="none">
+            <a:spAutoFit/>
+          </a:bodyPr>
+          <a:lstStyle/>
+          <a:p>
+            <a:pPr algn="l">
+              <a:defRPr sz="1400" b="1">
                 <a:solidFill>
                   <a:srgbClr val="C41E3A"/>
                 </a:solidFill>
@@ -5306,7 +9432,7 @@
               </a:defRPr>
             </a:pPr>
             <a:r>
-              <a:t>¡Hasta luego!</a:t>
+              <a:t>📝 AB-02c: Aufgabe 2</a:t>
             </a:r>
           </a:p>
         </p:txBody>
